--- a/tractor_jd_425.pptx
+++ b/tractor_jd_425.pptx
@@ -4,14 +4,20 @@
   <p:sldMasterIdLst>
     <p:sldMasterId id="2147483648" r:id="rId1"/>
   </p:sldMasterIdLst>
+  <p:notesMasterIdLst>
+    <p:notesMasterId r:id="rId12"/>
+  </p:notesMasterIdLst>
   <p:sldIdLst>
     <p:sldId id="270" r:id="rId2"/>
     <p:sldId id="279" r:id="rId3"/>
     <p:sldId id="280" r:id="rId4"/>
     <p:sldId id="281" r:id="rId5"/>
     <p:sldId id="277" r:id="rId6"/>
-    <p:sldId id="283" r:id="rId7"/>
-    <p:sldId id="282" r:id="rId8"/>
+    <p:sldId id="256" r:id="rId7"/>
+    <p:sldId id="257" r:id="rId8"/>
+    <p:sldId id="258" r:id="rId9"/>
+    <p:sldId id="283" r:id="rId10"/>
+    <p:sldId id="282" r:id="rId11"/>
   </p:sldIdLst>
   <p:sldSz cx="12192000" cy="6858000"/>
   <p:notesSz cx="6858000" cy="9144000"/>
@@ -118,6 +124,667 @@
 </p:presentation>
 </file>
 
+<file path=ppt/notesMasters/notesMaster1.xml><?xml version="1.0" encoding="utf-8"?>
+<p:notesMaster xmlns:a="http://schemas.openxmlformats.org/drawingml/2006/main" xmlns:r="http://schemas.openxmlformats.org/officeDocument/2006/relationships" xmlns:p="http://schemas.openxmlformats.org/presentationml/2006/main">
+  <p:cSld>
+    <p:bg>
+      <p:bgRef idx="1001">
+        <a:schemeClr val="bg1"/>
+      </p:bgRef>
+    </p:bg>
+    <p:spTree>
+      <p:nvGrpSpPr>
+        <p:cNvPr id="1" name=""/>
+        <p:cNvGrpSpPr/>
+        <p:nvPr/>
+      </p:nvGrpSpPr>
+      <p:grpSpPr>
+        <a:xfrm>
+          <a:off x="0" y="0"/>
+          <a:ext cx="0" cy="0"/>
+          <a:chOff x="0" y="0"/>
+          <a:chExt cx="0" cy="0"/>
+        </a:xfrm>
+      </p:grpSpPr>
+      <p:sp>
+        <p:nvSpPr>
+          <p:cNvPr id="2" name="Header Placeholder 1"/>
+          <p:cNvSpPr>
+            <a:spLocks noGrp="1"/>
+          </p:cNvSpPr>
+          <p:nvPr>
+            <p:ph type="hdr" sz="quarter"/>
+          </p:nvPr>
+        </p:nvSpPr>
+        <p:spPr>
+          <a:xfrm>
+            <a:off x="0" y="0"/>
+            <a:ext cx="2971800" cy="458788"/>
+          </a:xfrm>
+          <a:prstGeom prst="rect">
+            <a:avLst/>
+          </a:prstGeom>
+        </p:spPr>
+        <p:txBody>
+          <a:bodyPr vert="horz" lIns="91440" tIns="45720" rIns="91440" bIns="45720" rtlCol="0"/>
+          <a:lstStyle>
+            <a:lvl1pPr algn="l">
+              <a:defRPr sz="1200"/>
+            </a:lvl1pPr>
+          </a:lstStyle>
+          <a:p>
+            <a:endParaRPr lang="en-US"/>
+          </a:p>
+        </p:txBody>
+      </p:sp>
+      <p:sp>
+        <p:nvSpPr>
+          <p:cNvPr id="3" name="Date Placeholder 2"/>
+          <p:cNvSpPr>
+            <a:spLocks noGrp="1"/>
+          </p:cNvSpPr>
+          <p:nvPr>
+            <p:ph type="dt" idx="1"/>
+          </p:nvPr>
+        </p:nvSpPr>
+        <p:spPr>
+          <a:xfrm>
+            <a:off x="3884613" y="0"/>
+            <a:ext cx="2971800" cy="458788"/>
+          </a:xfrm>
+          <a:prstGeom prst="rect">
+            <a:avLst/>
+          </a:prstGeom>
+        </p:spPr>
+        <p:txBody>
+          <a:bodyPr vert="horz" lIns="91440" tIns="45720" rIns="91440" bIns="45720" rtlCol="0"/>
+          <a:lstStyle>
+            <a:lvl1pPr algn="r">
+              <a:defRPr sz="1200"/>
+            </a:lvl1pPr>
+          </a:lstStyle>
+          <a:p>
+            <a:fld id="{13CBACD6-B362-0043-A58B-A3D4BA3FEE7A}" type="datetimeFigureOut">
+              <a:rPr lang="en-US" smtClean="0"/>
+              <a:t>6/28/26</a:t>
+            </a:fld>
+            <a:endParaRPr lang="en-US"/>
+          </a:p>
+        </p:txBody>
+      </p:sp>
+      <p:sp>
+        <p:nvSpPr>
+          <p:cNvPr id="4" name="Slide Image Placeholder 3"/>
+          <p:cNvSpPr>
+            <a:spLocks noGrp="1" noRot="1" noChangeAspect="1"/>
+          </p:cNvSpPr>
+          <p:nvPr>
+            <p:ph type="sldImg" idx="2"/>
+          </p:nvPr>
+        </p:nvSpPr>
+        <p:spPr>
+          <a:xfrm>
+            <a:off x="685800" y="1143000"/>
+            <a:ext cx="5486400" cy="3086100"/>
+          </a:xfrm>
+          <a:prstGeom prst="rect">
+            <a:avLst/>
+          </a:prstGeom>
+          <a:noFill/>
+          <a:ln w="12700">
+            <a:solidFill>
+              <a:prstClr val="black"/>
+            </a:solidFill>
+          </a:ln>
+        </p:spPr>
+        <p:txBody>
+          <a:bodyPr vert="horz" lIns="91440" tIns="45720" rIns="91440" bIns="45720" rtlCol="0" anchor="ctr"/>
+          <a:lstStyle/>
+          <a:p>
+            <a:endParaRPr lang="en-US"/>
+          </a:p>
+        </p:txBody>
+      </p:sp>
+      <p:sp>
+        <p:nvSpPr>
+          <p:cNvPr id="5" name="Notes Placeholder 4"/>
+          <p:cNvSpPr>
+            <a:spLocks noGrp="1"/>
+          </p:cNvSpPr>
+          <p:nvPr>
+            <p:ph type="body" sz="quarter" idx="3"/>
+          </p:nvPr>
+        </p:nvSpPr>
+        <p:spPr>
+          <a:xfrm>
+            <a:off x="685800" y="4400550"/>
+            <a:ext cx="5486400" cy="3600450"/>
+          </a:xfrm>
+          <a:prstGeom prst="rect">
+            <a:avLst/>
+          </a:prstGeom>
+        </p:spPr>
+        <p:txBody>
+          <a:bodyPr vert="horz" lIns="91440" tIns="45720" rIns="91440" bIns="45720" rtlCol="0"/>
+          <a:lstStyle/>
+          <a:p>
+            <a:pPr lvl="0"/>
+            <a:r>
+              <a:rPr lang="en-US"/>
+              <a:t>Click to edit Master text styles</a:t>
+            </a:r>
+          </a:p>
+          <a:p>
+            <a:pPr lvl="1"/>
+            <a:r>
+              <a:rPr lang="en-US"/>
+              <a:t>Second level</a:t>
+            </a:r>
+          </a:p>
+          <a:p>
+            <a:pPr lvl="2"/>
+            <a:r>
+              <a:rPr lang="en-US"/>
+              <a:t>Third level</a:t>
+            </a:r>
+          </a:p>
+          <a:p>
+            <a:pPr lvl="3"/>
+            <a:r>
+              <a:rPr lang="en-US"/>
+              <a:t>Fourth level</a:t>
+            </a:r>
+          </a:p>
+          <a:p>
+            <a:pPr lvl="4"/>
+            <a:r>
+              <a:rPr lang="en-US"/>
+              <a:t>Fifth level</a:t>
+            </a:r>
+          </a:p>
+        </p:txBody>
+      </p:sp>
+      <p:sp>
+        <p:nvSpPr>
+          <p:cNvPr id="6" name="Footer Placeholder 5"/>
+          <p:cNvSpPr>
+            <a:spLocks noGrp="1"/>
+          </p:cNvSpPr>
+          <p:nvPr>
+            <p:ph type="ftr" sz="quarter" idx="4"/>
+          </p:nvPr>
+        </p:nvSpPr>
+        <p:spPr>
+          <a:xfrm>
+            <a:off x="0" y="8685213"/>
+            <a:ext cx="2971800" cy="458787"/>
+          </a:xfrm>
+          <a:prstGeom prst="rect">
+            <a:avLst/>
+          </a:prstGeom>
+        </p:spPr>
+        <p:txBody>
+          <a:bodyPr vert="horz" lIns="91440" tIns="45720" rIns="91440" bIns="45720" rtlCol="0" anchor="b"/>
+          <a:lstStyle>
+            <a:lvl1pPr algn="l">
+              <a:defRPr sz="1200"/>
+            </a:lvl1pPr>
+          </a:lstStyle>
+          <a:p>
+            <a:endParaRPr lang="en-US"/>
+          </a:p>
+        </p:txBody>
+      </p:sp>
+      <p:sp>
+        <p:nvSpPr>
+          <p:cNvPr id="7" name="Slide Number Placeholder 6"/>
+          <p:cNvSpPr>
+            <a:spLocks noGrp="1"/>
+          </p:cNvSpPr>
+          <p:nvPr>
+            <p:ph type="sldNum" sz="quarter" idx="5"/>
+          </p:nvPr>
+        </p:nvSpPr>
+        <p:spPr>
+          <a:xfrm>
+            <a:off x="3884613" y="8685213"/>
+            <a:ext cx="2971800" cy="458787"/>
+          </a:xfrm>
+          <a:prstGeom prst="rect">
+            <a:avLst/>
+          </a:prstGeom>
+        </p:spPr>
+        <p:txBody>
+          <a:bodyPr vert="horz" lIns="91440" tIns="45720" rIns="91440" bIns="45720" rtlCol="0" anchor="b"/>
+          <a:lstStyle>
+            <a:lvl1pPr algn="r">
+              <a:defRPr sz="1200"/>
+            </a:lvl1pPr>
+          </a:lstStyle>
+          <a:p>
+            <a:fld id="{E5B4E46E-59E3-D340-93A2-E908CA0C9EE2}" type="slidenum">
+              <a:rPr lang="en-US" smtClean="0"/>
+              <a:t>‹#›</a:t>
+            </a:fld>
+            <a:endParaRPr lang="en-US"/>
+          </a:p>
+        </p:txBody>
+      </p:sp>
+    </p:spTree>
+    <p:extLst>
+      <p:ext uri="{BB962C8B-B14F-4D97-AF65-F5344CB8AC3E}">
+        <p14:creationId xmlns:p14="http://schemas.microsoft.com/office/powerpoint/2010/main" val="1975272783"/>
+      </p:ext>
+    </p:extLst>
+  </p:cSld>
+  <p:clrMap bg1="lt1" tx1="dk1" bg2="lt2" tx2="dk2" accent1="accent1" accent2="accent2" accent3="accent3" accent4="accent4" accent5="accent5" accent6="accent6" hlink="hlink" folHlink="folHlink"/>
+  <p:notesStyle>
+    <a:lvl1pPr marL="0" algn="l" defTabSz="914400" rtl="0" eaLnBrk="1" latinLnBrk="0" hangingPunct="1">
+      <a:defRPr sz="1200" kern="1200">
+        <a:solidFill>
+          <a:schemeClr val="tx1"/>
+        </a:solidFill>
+        <a:latin typeface="+mn-lt"/>
+        <a:ea typeface="+mn-ea"/>
+        <a:cs typeface="+mn-cs"/>
+      </a:defRPr>
+    </a:lvl1pPr>
+    <a:lvl2pPr marL="457200" algn="l" defTabSz="914400" rtl="0" eaLnBrk="1" latinLnBrk="0" hangingPunct="1">
+      <a:defRPr sz="1200" kern="1200">
+        <a:solidFill>
+          <a:schemeClr val="tx1"/>
+        </a:solidFill>
+        <a:latin typeface="+mn-lt"/>
+        <a:ea typeface="+mn-ea"/>
+        <a:cs typeface="+mn-cs"/>
+      </a:defRPr>
+    </a:lvl2pPr>
+    <a:lvl3pPr marL="914400" algn="l" defTabSz="914400" rtl="0" eaLnBrk="1" latinLnBrk="0" hangingPunct="1">
+      <a:defRPr sz="1200" kern="1200">
+        <a:solidFill>
+          <a:schemeClr val="tx1"/>
+        </a:solidFill>
+        <a:latin typeface="+mn-lt"/>
+        <a:ea typeface="+mn-ea"/>
+        <a:cs typeface="+mn-cs"/>
+      </a:defRPr>
+    </a:lvl3pPr>
+    <a:lvl4pPr marL="1371600" algn="l" defTabSz="914400" rtl="0" eaLnBrk="1" latinLnBrk="0" hangingPunct="1">
+      <a:defRPr sz="1200" kern="1200">
+        <a:solidFill>
+          <a:schemeClr val="tx1"/>
+        </a:solidFill>
+        <a:latin typeface="+mn-lt"/>
+        <a:ea typeface="+mn-ea"/>
+        <a:cs typeface="+mn-cs"/>
+      </a:defRPr>
+    </a:lvl4pPr>
+    <a:lvl5pPr marL="1828800" algn="l" defTabSz="914400" rtl="0" eaLnBrk="1" latinLnBrk="0" hangingPunct="1">
+      <a:defRPr sz="1200" kern="1200">
+        <a:solidFill>
+          <a:schemeClr val="tx1"/>
+        </a:solidFill>
+        <a:latin typeface="+mn-lt"/>
+        <a:ea typeface="+mn-ea"/>
+        <a:cs typeface="+mn-cs"/>
+      </a:defRPr>
+    </a:lvl5pPr>
+    <a:lvl6pPr marL="2286000" algn="l" defTabSz="914400" rtl="0" eaLnBrk="1" latinLnBrk="0" hangingPunct="1">
+      <a:defRPr sz="1200" kern="1200">
+        <a:solidFill>
+          <a:schemeClr val="tx1"/>
+        </a:solidFill>
+        <a:latin typeface="+mn-lt"/>
+        <a:ea typeface="+mn-ea"/>
+        <a:cs typeface="+mn-cs"/>
+      </a:defRPr>
+    </a:lvl6pPr>
+    <a:lvl7pPr marL="2743200" algn="l" defTabSz="914400" rtl="0" eaLnBrk="1" latinLnBrk="0" hangingPunct="1">
+      <a:defRPr sz="1200" kern="1200">
+        <a:solidFill>
+          <a:schemeClr val="tx1"/>
+        </a:solidFill>
+        <a:latin typeface="+mn-lt"/>
+        <a:ea typeface="+mn-ea"/>
+        <a:cs typeface="+mn-cs"/>
+      </a:defRPr>
+    </a:lvl7pPr>
+    <a:lvl8pPr marL="3200400" algn="l" defTabSz="914400" rtl="0" eaLnBrk="1" latinLnBrk="0" hangingPunct="1">
+      <a:defRPr sz="1200" kern="1200">
+        <a:solidFill>
+          <a:schemeClr val="tx1"/>
+        </a:solidFill>
+        <a:latin typeface="+mn-lt"/>
+        <a:ea typeface="+mn-ea"/>
+        <a:cs typeface="+mn-cs"/>
+      </a:defRPr>
+    </a:lvl8pPr>
+    <a:lvl9pPr marL="3657600" algn="l" defTabSz="914400" rtl="0" eaLnBrk="1" latinLnBrk="0" hangingPunct="1">
+      <a:defRPr sz="1200" kern="1200">
+        <a:solidFill>
+          <a:schemeClr val="tx1"/>
+        </a:solidFill>
+        <a:latin typeface="+mn-lt"/>
+        <a:ea typeface="+mn-ea"/>
+        <a:cs typeface="+mn-cs"/>
+      </a:defRPr>
+    </a:lvl9pPr>
+  </p:notesStyle>
+</p:notesMaster>
+</file>
+
+<file path=ppt/notesSlides/notesSlide1.xml><?xml version="1.0" encoding="utf-8"?>
+<p:notes xmlns:a="http://schemas.openxmlformats.org/drawingml/2006/main" xmlns:r="http://schemas.openxmlformats.org/officeDocument/2006/relationships" xmlns:p="http://schemas.openxmlformats.org/presentationml/2006/main" showMasterSp="0" showMasterPhAnim="0">
+  <p:cSld>
+    <p:spTree>
+      <p:nvGrpSpPr>
+        <p:cNvPr id="1" name="Shape 50"/>
+        <p:cNvGrpSpPr/>
+        <p:nvPr/>
+      </p:nvGrpSpPr>
+      <p:grpSpPr>
+        <a:xfrm>
+          <a:off x="0" y="0"/>
+          <a:ext cx="0" cy="0"/>
+          <a:chOff x="0" y="0"/>
+          <a:chExt cx="0" cy="0"/>
+        </a:xfrm>
+      </p:grpSpPr>
+      <p:sp>
+        <p:nvSpPr>
+          <p:cNvPr id="51" name="Google Shape;51;p:notes"/>
+          <p:cNvSpPr>
+            <a:spLocks noGrp="1" noRot="1" noChangeAspect="1"/>
+          </p:cNvSpPr>
+          <p:nvPr>
+            <p:ph type="sldImg" idx="2"/>
+          </p:nvPr>
+        </p:nvSpPr>
+        <p:spPr>
+          <a:xfrm>
+            <a:off x="381300" y="685800"/>
+            <a:ext cx="6096075" cy="3429000"/>
+          </a:xfrm>
+          <a:custGeom>
+            <a:avLst/>
+            <a:gdLst/>
+            <a:ahLst/>
+            <a:cxnLst/>
+            <a:rect l="l" t="t" r="r" b="b"/>
+            <a:pathLst>
+              <a:path w="120000" h="120000" extrusionOk="0">
+                <a:moveTo>
+                  <a:pt x="0" y="0"/>
+                </a:moveTo>
+                <a:lnTo>
+                  <a:pt x="120000" y="0"/>
+                </a:lnTo>
+                <a:lnTo>
+                  <a:pt x="120000" y="120000"/>
+                </a:lnTo>
+                <a:lnTo>
+                  <a:pt x="0" y="120000"/>
+                </a:lnTo>
+                <a:close/>
+              </a:path>
+            </a:pathLst>
+          </a:custGeom>
+        </p:spPr>
+      </p:sp>
+      <p:sp>
+        <p:nvSpPr>
+          <p:cNvPr id="52" name="Google Shape;52;p:notes"/>
+          <p:cNvSpPr txBox="1">
+            <a:spLocks noGrp="1"/>
+          </p:cNvSpPr>
+          <p:nvPr>
+            <p:ph type="body" idx="1"/>
+          </p:nvPr>
+        </p:nvSpPr>
+        <p:spPr>
+          <a:xfrm>
+            <a:off x="685800" y="4343400"/>
+            <a:ext cx="5486400" cy="4114800"/>
+          </a:xfrm>
+          <a:prstGeom prst="rect">
+            <a:avLst/>
+          </a:prstGeom>
+        </p:spPr>
+        <p:txBody>
+          <a:bodyPr spcFirstLastPara="1" wrap="square" lIns="91425" tIns="91425" rIns="91425" bIns="91425" anchor="t" anchorCtr="0">
+            <a:noAutofit/>
+          </a:bodyPr>
+          <a:lstStyle/>
+          <a:p>
+            <a:pPr marL="0" lvl="0" indent="0" algn="l" rtl="0">
+              <a:spcBef>
+                <a:spcPts val="0"/>
+              </a:spcBef>
+              <a:spcAft>
+                <a:spcPts val="0"/>
+              </a:spcAft>
+              <a:buNone/>
+            </a:pPr>
+            <a:endParaRPr/>
+          </a:p>
+        </p:txBody>
+      </p:sp>
+    </p:spTree>
+  </p:cSld>
+  <p:clrMapOvr>
+    <a:masterClrMapping/>
+  </p:clrMapOvr>
+</p:notes>
+</file>
+
+<file path=ppt/notesSlides/notesSlide2.xml><?xml version="1.0" encoding="utf-8"?>
+<p:notes xmlns:a="http://schemas.openxmlformats.org/drawingml/2006/main" xmlns:r="http://schemas.openxmlformats.org/officeDocument/2006/relationships" xmlns:p="http://schemas.openxmlformats.org/presentationml/2006/main" showMasterSp="0" showMasterPhAnim="0">
+  <p:cSld>
+    <p:spTree>
+      <p:nvGrpSpPr>
+        <p:cNvPr id="1" name="Shape 63"/>
+        <p:cNvGrpSpPr/>
+        <p:nvPr/>
+      </p:nvGrpSpPr>
+      <p:grpSpPr>
+        <a:xfrm>
+          <a:off x="0" y="0"/>
+          <a:ext cx="0" cy="0"/>
+          <a:chOff x="0" y="0"/>
+          <a:chExt cx="0" cy="0"/>
+        </a:xfrm>
+      </p:grpSpPr>
+      <p:sp>
+        <p:nvSpPr>
+          <p:cNvPr id="64" name="Google Shape;64;g3ec60621966_0_3:notes"/>
+          <p:cNvSpPr>
+            <a:spLocks noGrp="1" noRot="1" noChangeAspect="1"/>
+          </p:cNvSpPr>
+          <p:nvPr>
+            <p:ph type="sldImg" idx="2"/>
+          </p:nvPr>
+        </p:nvSpPr>
+        <p:spPr>
+          <a:xfrm>
+            <a:off x="381300" y="685800"/>
+            <a:ext cx="6096000" cy="3429000"/>
+          </a:xfrm>
+          <a:custGeom>
+            <a:avLst/>
+            <a:gdLst/>
+            <a:ahLst/>
+            <a:cxnLst/>
+            <a:rect l="l" t="t" r="r" b="b"/>
+            <a:pathLst>
+              <a:path w="120000" h="120000" extrusionOk="0">
+                <a:moveTo>
+                  <a:pt x="0" y="0"/>
+                </a:moveTo>
+                <a:lnTo>
+                  <a:pt x="120000" y="0"/>
+                </a:lnTo>
+                <a:lnTo>
+                  <a:pt x="120000" y="120000"/>
+                </a:lnTo>
+                <a:lnTo>
+                  <a:pt x="0" y="120000"/>
+                </a:lnTo>
+                <a:close/>
+              </a:path>
+            </a:pathLst>
+          </a:custGeom>
+        </p:spPr>
+      </p:sp>
+      <p:sp>
+        <p:nvSpPr>
+          <p:cNvPr id="65" name="Google Shape;65;g3ec60621966_0_3:notes"/>
+          <p:cNvSpPr txBox="1">
+            <a:spLocks noGrp="1"/>
+          </p:cNvSpPr>
+          <p:nvPr>
+            <p:ph type="body" idx="1"/>
+          </p:nvPr>
+        </p:nvSpPr>
+        <p:spPr>
+          <a:xfrm>
+            <a:off x="685800" y="4343400"/>
+            <a:ext cx="5486400" cy="4114800"/>
+          </a:xfrm>
+          <a:prstGeom prst="rect">
+            <a:avLst/>
+          </a:prstGeom>
+        </p:spPr>
+        <p:txBody>
+          <a:bodyPr spcFirstLastPara="1" wrap="square" lIns="91425" tIns="91425" rIns="91425" bIns="91425" anchor="t" anchorCtr="0">
+            <a:noAutofit/>
+          </a:bodyPr>
+          <a:lstStyle/>
+          <a:p>
+            <a:pPr marL="0" lvl="0" indent="0" algn="l" rtl="0">
+              <a:spcBef>
+                <a:spcPts val="0"/>
+              </a:spcBef>
+              <a:spcAft>
+                <a:spcPts val="0"/>
+              </a:spcAft>
+              <a:buNone/>
+            </a:pPr>
+            <a:endParaRPr/>
+          </a:p>
+        </p:txBody>
+      </p:sp>
+    </p:spTree>
+  </p:cSld>
+  <p:clrMapOvr>
+    <a:masterClrMapping/>
+  </p:clrMapOvr>
+</p:notes>
+</file>
+
+<file path=ppt/notesSlides/notesSlide3.xml><?xml version="1.0" encoding="utf-8"?>
+<p:notes xmlns:a="http://schemas.openxmlformats.org/drawingml/2006/main" xmlns:r="http://schemas.openxmlformats.org/officeDocument/2006/relationships" xmlns:p="http://schemas.openxmlformats.org/presentationml/2006/main" showMasterSp="0" showMasterPhAnim="0">
+  <p:cSld>
+    <p:spTree>
+      <p:nvGrpSpPr>
+        <p:cNvPr id="1" name="Shape 76"/>
+        <p:cNvGrpSpPr/>
+        <p:nvPr/>
+      </p:nvGrpSpPr>
+      <p:grpSpPr>
+        <a:xfrm>
+          <a:off x="0" y="0"/>
+          <a:ext cx="0" cy="0"/>
+          <a:chOff x="0" y="0"/>
+          <a:chExt cx="0" cy="0"/>
+        </a:xfrm>
+      </p:grpSpPr>
+      <p:sp>
+        <p:nvSpPr>
+          <p:cNvPr id="77" name="Google Shape;77;g3ed911933c0_0_0:notes"/>
+          <p:cNvSpPr>
+            <a:spLocks noGrp="1" noRot="1" noChangeAspect="1"/>
+          </p:cNvSpPr>
+          <p:nvPr>
+            <p:ph type="sldImg" idx="2"/>
+          </p:nvPr>
+        </p:nvSpPr>
+        <p:spPr>
+          <a:xfrm>
+            <a:off x="381000" y="685800"/>
+            <a:ext cx="6096000" cy="3429000"/>
+          </a:xfrm>
+          <a:custGeom>
+            <a:avLst/>
+            <a:gdLst/>
+            <a:ahLst/>
+            <a:cxnLst/>
+            <a:rect l="l" t="t" r="r" b="b"/>
+            <a:pathLst>
+              <a:path w="120000" h="120000" extrusionOk="0">
+                <a:moveTo>
+                  <a:pt x="0" y="0"/>
+                </a:moveTo>
+                <a:lnTo>
+                  <a:pt x="120000" y="0"/>
+                </a:lnTo>
+                <a:lnTo>
+                  <a:pt x="120000" y="120000"/>
+                </a:lnTo>
+                <a:lnTo>
+                  <a:pt x="0" y="120000"/>
+                </a:lnTo>
+                <a:close/>
+              </a:path>
+            </a:pathLst>
+          </a:custGeom>
+        </p:spPr>
+      </p:sp>
+      <p:sp>
+        <p:nvSpPr>
+          <p:cNvPr id="78" name="Google Shape;78;g3ed911933c0_0_0:notes"/>
+          <p:cNvSpPr txBox="1">
+            <a:spLocks noGrp="1"/>
+          </p:cNvSpPr>
+          <p:nvPr>
+            <p:ph type="body" idx="1"/>
+          </p:nvPr>
+        </p:nvSpPr>
+        <p:spPr>
+          <a:xfrm>
+            <a:off x="685800" y="4343400"/>
+            <a:ext cx="5486400" cy="4114800"/>
+          </a:xfrm>
+          <a:prstGeom prst="rect">
+            <a:avLst/>
+          </a:prstGeom>
+        </p:spPr>
+        <p:txBody>
+          <a:bodyPr spcFirstLastPara="1" wrap="square" lIns="91425" tIns="91425" rIns="91425" bIns="91425" anchor="t" anchorCtr="0">
+            <a:noAutofit/>
+          </a:bodyPr>
+          <a:lstStyle/>
+          <a:p>
+            <a:pPr marL="0" lvl="0" indent="0" algn="l" rtl="0">
+              <a:spcBef>
+                <a:spcPts val="0"/>
+              </a:spcBef>
+              <a:spcAft>
+                <a:spcPts val="0"/>
+              </a:spcAft>
+              <a:buNone/>
+            </a:pPr>
+            <a:endParaRPr/>
+          </a:p>
+        </p:txBody>
+      </p:sp>
+    </p:spTree>
+  </p:cSld>
+  <p:clrMapOvr>
+    <a:masterClrMapping/>
+  </p:clrMapOvr>
+</p:notes>
+</file>
+
 <file path=ppt/slideLayouts/slideLayout1.xml><?xml version="1.0" encoding="utf-8"?>
 <p:sldLayout xmlns:a="http://schemas.openxmlformats.org/drawingml/2006/main" xmlns:r="http://schemas.openxmlformats.org/officeDocument/2006/relationships" xmlns:p="http://schemas.openxmlformats.org/presentationml/2006/main" type="title" preserve="1">
   <p:cSld name="Title Slide">
@@ -264,7 +931,7 @@
           <a:lstStyle/>
           <a:p>
             <a:fld id="{16286276-9013-2A43-82D1-BA4685C95117}" type="datetimeFigureOut">
-              <a:t>7/30/25</a:t>
+              <a:t>6/28/26</a:t>
             </a:fld>
             <a:endParaRPr lang="en-US"/>
           </a:p>
@@ -460,7 +1127,7 @@
           <a:lstStyle/>
           <a:p>
             <a:fld id="{16286276-9013-2A43-82D1-BA4685C95117}" type="datetimeFigureOut">
-              <a:t>7/30/25</a:t>
+              <a:t>6/28/26</a:t>
             </a:fld>
             <a:endParaRPr lang="en-US"/>
           </a:p>
@@ -666,7 +1333,7 @@
           <a:lstStyle/>
           <a:p>
             <a:fld id="{16286276-9013-2A43-82D1-BA4685C95117}" type="datetimeFigureOut">
-              <a:t>7/30/25</a:t>
+              <a:t>6/28/26</a:t>
             </a:fld>
             <a:endParaRPr lang="en-US"/>
           </a:p>
@@ -862,7 +1529,7 @@
           <a:lstStyle/>
           <a:p>
             <a:fld id="{16286276-9013-2A43-82D1-BA4685C95117}" type="datetimeFigureOut">
-              <a:t>7/30/25</a:t>
+              <a:t>6/28/26</a:t>
             </a:fld>
             <a:endParaRPr lang="en-US"/>
           </a:p>
@@ -1135,7 +1802,7 @@
           <a:lstStyle/>
           <a:p>
             <a:fld id="{16286276-9013-2A43-82D1-BA4685C95117}" type="datetimeFigureOut">
-              <a:t>7/30/25</a:t>
+              <a:t>6/28/26</a:t>
             </a:fld>
             <a:endParaRPr lang="en-US"/>
           </a:p>
@@ -1398,7 +2065,7 @@
           <a:lstStyle/>
           <a:p>
             <a:fld id="{16286276-9013-2A43-82D1-BA4685C95117}" type="datetimeFigureOut">
-              <a:t>7/30/25</a:t>
+              <a:t>6/28/26</a:t>
             </a:fld>
             <a:endParaRPr lang="en-US"/>
           </a:p>
@@ -1808,7 +2475,7 @@
           <a:lstStyle/>
           <a:p>
             <a:fld id="{16286276-9013-2A43-82D1-BA4685C95117}" type="datetimeFigureOut">
-              <a:t>7/30/25</a:t>
+              <a:t>6/28/26</a:t>
             </a:fld>
             <a:endParaRPr lang="en-US"/>
           </a:p>
@@ -1947,7 +2614,7 @@
           <a:lstStyle/>
           <a:p>
             <a:fld id="{16286276-9013-2A43-82D1-BA4685C95117}" type="datetimeFigureOut">
-              <a:t>7/30/25</a:t>
+              <a:t>6/28/26</a:t>
             </a:fld>
             <a:endParaRPr lang="en-US"/>
           </a:p>
@@ -2058,7 +2725,7 @@
           <a:lstStyle/>
           <a:p>
             <a:fld id="{16286276-9013-2A43-82D1-BA4685C95117}" type="datetimeFigureOut">
-              <a:t>7/30/25</a:t>
+              <a:t>6/28/26</a:t>
             </a:fld>
             <a:endParaRPr lang="en-US"/>
           </a:p>
@@ -2367,7 +3034,7 @@
           <a:lstStyle/>
           <a:p>
             <a:fld id="{16286276-9013-2A43-82D1-BA4685C95117}" type="datetimeFigureOut">
-              <a:t>7/30/25</a:t>
+              <a:t>6/28/26</a:t>
             </a:fld>
             <a:endParaRPr lang="en-US"/>
           </a:p>
@@ -2653,7 +3320,7 @@
           <a:lstStyle/>
           <a:p>
             <a:fld id="{16286276-9013-2A43-82D1-BA4685C95117}" type="datetimeFigureOut">
-              <a:t>7/30/25</a:t>
+              <a:t>6/28/26</a:t>
             </a:fld>
             <a:endParaRPr lang="en-US"/>
           </a:p>
@@ -2892,7 +3559,7 @@
           </a:lstStyle>
           <a:p>
             <a:fld id="{16286276-9013-2A43-82D1-BA4685C95117}" type="datetimeFigureOut">
-              <a:t>7/30/25</a:t>
+              <a:t>6/28/26</a:t>
             </a:fld>
             <a:endParaRPr lang="en-US"/>
           </a:p>
@@ -4059,6 +4726,700 @@
     <p:extLst>
       <p:ext uri="{BB962C8B-B14F-4D97-AF65-F5344CB8AC3E}">
         <p14:creationId xmlns:p14="http://schemas.microsoft.com/office/powerpoint/2010/main" val="3989724378"/>
+      </p:ext>
+    </p:extLst>
+  </p:cSld>
+  <p:clrMapOvr>
+    <a:masterClrMapping/>
+  </p:clrMapOvr>
+</p:sld>
+</file>
+
+<file path=ppt/slides/slide10.xml><?xml version="1.0" encoding="utf-8"?>
+<p:sld xmlns:a="http://schemas.openxmlformats.org/drawingml/2006/main" xmlns:r="http://schemas.openxmlformats.org/officeDocument/2006/relationships" xmlns:p="http://schemas.openxmlformats.org/presentationml/2006/main">
+  <p:cSld>
+    <p:spTree>
+      <p:nvGrpSpPr>
+        <p:cNvPr id="1" name="">
+          <a:extLst>
+            <a:ext uri="{FF2B5EF4-FFF2-40B4-BE49-F238E27FC236}">
+              <a16:creationId xmlns:a16="http://schemas.microsoft.com/office/drawing/2014/main" id="{C69DFF58-FBBF-53F0-A28B-B37995B4784E}"/>
+            </a:ext>
+          </a:extLst>
+        </p:cNvPr>
+        <p:cNvGrpSpPr/>
+        <p:nvPr/>
+      </p:nvGrpSpPr>
+      <p:grpSpPr>
+        <a:xfrm>
+          <a:off x="0" y="0"/>
+          <a:ext cx="0" cy="0"/>
+          <a:chOff x="0" y="0"/>
+          <a:chExt cx="0" cy="0"/>
+        </a:xfrm>
+      </p:grpSpPr>
+      <p:sp>
+        <p:nvSpPr>
+          <p:cNvPr id="2" name="TextBox 1">
+            <a:extLst>
+              <a:ext uri="{FF2B5EF4-FFF2-40B4-BE49-F238E27FC236}">
+                <a16:creationId xmlns:a16="http://schemas.microsoft.com/office/drawing/2014/main" id="{2EB671DF-9B83-58E4-1589-582DFF8EC478}"/>
+              </a:ext>
+            </a:extLst>
+          </p:cNvPr>
+          <p:cNvSpPr txBox="1"/>
+          <p:nvPr/>
+        </p:nvSpPr>
+        <p:spPr>
+          <a:xfrm>
+            <a:off x="168166" y="111093"/>
+            <a:ext cx="4117119" cy="523220"/>
+          </a:xfrm>
+          <a:prstGeom prst="rect">
+            <a:avLst/>
+          </a:prstGeom>
+          <a:noFill/>
+        </p:spPr>
+        <p:txBody>
+          <a:bodyPr wrap="square" rtlCol="0">
+            <a:spAutoFit/>
+          </a:bodyPr>
+          <a:lstStyle/>
+          <a:p>
+            <a:r>
+              <a:rPr lang="en-US" sz="2800" b="1" dirty="0"/>
+              <a:t>Modern JD Loan Tractors</a:t>
+            </a:r>
+          </a:p>
+        </p:txBody>
+      </p:sp>
+      <p:sp>
+        <p:nvSpPr>
+          <p:cNvPr id="31" name="TextBox 30">
+            <a:extLst>
+              <a:ext uri="{FF2B5EF4-FFF2-40B4-BE49-F238E27FC236}">
+                <a16:creationId xmlns:a16="http://schemas.microsoft.com/office/drawing/2014/main" id="{2BA9A503-459B-12FC-6EA2-5A8EA16297E2}"/>
+              </a:ext>
+            </a:extLst>
+          </p:cNvPr>
+          <p:cNvSpPr txBox="1"/>
+          <p:nvPr/>
+        </p:nvSpPr>
+        <p:spPr>
+          <a:xfrm>
+            <a:off x="241741" y="634313"/>
+            <a:ext cx="3741680" cy="276999"/>
+          </a:xfrm>
+          <a:prstGeom prst="rect">
+            <a:avLst/>
+          </a:prstGeom>
+          <a:noFill/>
+        </p:spPr>
+        <p:txBody>
+          <a:bodyPr wrap="square" rtlCol="0">
+            <a:spAutoFit/>
+          </a:bodyPr>
+          <a:lstStyle/>
+          <a:p>
+            <a:pPr algn="ctr"/>
+            <a:r>
+              <a:rPr lang="en-US" sz="1200" dirty="0">
+                <a:hlinkClick r:id="rId2"/>
+              </a:rPr>
+              <a:t>https://</a:t>
+            </a:r>
+            <a:r>
+              <a:rPr lang="en-US" sz="1200" dirty="0" err="1">
+                <a:hlinkClick r:id="rId2"/>
+              </a:rPr>
+              <a:t>www.deere.com</a:t>
+            </a:r>
+            <a:r>
+              <a:rPr lang="en-US" sz="1200" dirty="0">
+                <a:hlinkClick r:id="rId2"/>
+              </a:rPr>
+              <a:t>/</a:t>
+            </a:r>
+            <a:r>
+              <a:rPr lang="en-US" sz="1200" dirty="0" err="1">
+                <a:hlinkClick r:id="rId2"/>
+              </a:rPr>
+              <a:t>en</a:t>
+            </a:r>
+            <a:r>
+              <a:rPr lang="en-US" sz="1200" dirty="0">
+                <a:hlinkClick r:id="rId2"/>
+              </a:rPr>
+              <a:t>/mowers/lawn-tractors/</a:t>
+            </a:r>
+            <a:endParaRPr lang="en-US" sz="1200" dirty="0"/>
+          </a:p>
+        </p:txBody>
+      </p:sp>
+      <p:pic>
+        <p:nvPicPr>
+          <p:cNvPr id="1026" name="Picture 2" descr="studio image of the S100 Series lawn mower">
+            <a:extLst>
+              <a:ext uri="{FF2B5EF4-FFF2-40B4-BE49-F238E27FC236}">
+                <a16:creationId xmlns:a16="http://schemas.microsoft.com/office/drawing/2014/main" id="{A4E09826-02EB-A97D-A609-B18C5511BF4C}"/>
+              </a:ext>
+            </a:extLst>
+          </p:cNvPr>
+          <p:cNvPicPr>
+            <a:picLocks noChangeAspect="1" noChangeArrowheads="1"/>
+          </p:cNvPicPr>
+          <p:nvPr/>
+        </p:nvPicPr>
+        <p:blipFill rotWithShape="1">
+          <a:blip r:embed="rId3" cstate="email">
+            <a:extLst>
+              <a:ext uri="{28A0092B-C50C-407E-A947-70E740481C1C}">
+                <a14:useLocalDpi xmlns:a14="http://schemas.microsoft.com/office/drawing/2010/main"/>
+              </a:ext>
+            </a:extLst>
+          </a:blip>
+          <a:srcRect/>
+          <a:stretch/>
+        </p:blipFill>
+        <p:spPr bwMode="auto">
+          <a:xfrm>
+            <a:off x="2037732" y="1444030"/>
+            <a:ext cx="1407217" cy="1152977"/>
+          </a:xfrm>
+          <a:prstGeom prst="rect">
+            <a:avLst/>
+          </a:prstGeom>
+          <a:noFill/>
+          <a:extLst>
+            <a:ext uri="{909E8E84-426E-40DD-AFC4-6F175D3DCCD1}">
+              <a14:hiddenFill xmlns:a14="http://schemas.microsoft.com/office/drawing/2010/main">
+                <a:solidFill>
+                  <a:srgbClr val="FFFFFF"/>
+                </a:solidFill>
+              </a14:hiddenFill>
+            </a:ext>
+          </a:extLst>
+        </p:spPr>
+      </p:pic>
+      <p:sp>
+        <p:nvSpPr>
+          <p:cNvPr id="7" name="TextBox 6">
+            <a:extLst>
+              <a:ext uri="{FF2B5EF4-FFF2-40B4-BE49-F238E27FC236}">
+                <a16:creationId xmlns:a16="http://schemas.microsoft.com/office/drawing/2014/main" id="{FF534CAE-D169-9E26-0F8D-601355DD9B78}"/>
+              </a:ext>
+            </a:extLst>
+          </p:cNvPr>
+          <p:cNvSpPr txBox="1"/>
+          <p:nvPr/>
+        </p:nvSpPr>
+        <p:spPr>
+          <a:xfrm>
+            <a:off x="415160" y="1713620"/>
+            <a:ext cx="1329558" cy="646331"/>
+          </a:xfrm>
+          <a:prstGeom prst="rect">
+            <a:avLst/>
+          </a:prstGeom>
+          <a:noFill/>
+        </p:spPr>
+        <p:txBody>
+          <a:bodyPr wrap="square" rtlCol="0">
+            <a:spAutoFit/>
+          </a:bodyPr>
+          <a:lstStyle/>
+          <a:p>
+            <a:r>
+              <a:rPr lang="en-US" sz="1200" b="1" dirty="0"/>
+              <a:t>Series S100</a:t>
+            </a:r>
+          </a:p>
+          <a:p>
+            <a:r>
+              <a:rPr lang="en-US" sz="1200" b="1" dirty="0"/>
+              <a:t>42,48,54" wide</a:t>
+            </a:r>
+            <a:endParaRPr lang="en-US" sz="1200" b="1" dirty="0">
+              <a:solidFill>
+                <a:srgbClr val="FF0000"/>
+              </a:solidFill>
+            </a:endParaRPr>
+          </a:p>
+          <a:p>
+            <a:r>
+              <a:rPr lang="en-US" sz="1200" b="1" dirty="0">
+                <a:solidFill>
+                  <a:srgbClr val="FF0000"/>
+                </a:solidFill>
+              </a:rPr>
+              <a:t>$2.4 - $3.6K</a:t>
+            </a:r>
+          </a:p>
+        </p:txBody>
+      </p:sp>
+      <p:sp>
+        <p:nvSpPr>
+          <p:cNvPr id="9" name="TextBox 8">
+            <a:extLst>
+              <a:ext uri="{FF2B5EF4-FFF2-40B4-BE49-F238E27FC236}">
+                <a16:creationId xmlns:a16="http://schemas.microsoft.com/office/drawing/2014/main" id="{42C34B3C-8F87-D0A7-0EE5-06FBF377BD4D}"/>
+              </a:ext>
+            </a:extLst>
+          </p:cNvPr>
+          <p:cNvSpPr txBox="1"/>
+          <p:nvPr/>
+        </p:nvSpPr>
+        <p:spPr>
+          <a:xfrm>
+            <a:off x="415160" y="3333580"/>
+            <a:ext cx="1030868" cy="646331"/>
+          </a:xfrm>
+          <a:prstGeom prst="rect">
+            <a:avLst/>
+          </a:prstGeom>
+          <a:noFill/>
+        </p:spPr>
+        <p:txBody>
+          <a:bodyPr wrap="square" rtlCol="0">
+            <a:spAutoFit/>
+          </a:bodyPr>
+          <a:lstStyle/>
+          <a:p>
+            <a:r>
+              <a:rPr lang="en-US" sz="1200" b="1" dirty="0"/>
+              <a:t>Series S200</a:t>
+            </a:r>
+          </a:p>
+          <a:p>
+            <a:r>
+              <a:rPr lang="en-US" sz="1200" b="1" dirty="0"/>
+              <a:t>42,48 wide</a:t>
+            </a:r>
+            <a:endParaRPr lang="en-US" sz="1200" b="1" dirty="0">
+              <a:solidFill>
+                <a:srgbClr val="FF0000"/>
+              </a:solidFill>
+            </a:endParaRPr>
+          </a:p>
+          <a:p>
+            <a:r>
+              <a:rPr lang="en-US" sz="1200" b="1" dirty="0">
+                <a:solidFill>
+                  <a:srgbClr val="FF0000"/>
+                </a:solidFill>
+              </a:rPr>
+              <a:t>$3.3-3.7K</a:t>
+            </a:r>
+          </a:p>
+        </p:txBody>
+      </p:sp>
+      <p:sp>
+        <p:nvSpPr>
+          <p:cNvPr id="26" name="TextBox 25">
+            <a:extLst>
+              <a:ext uri="{FF2B5EF4-FFF2-40B4-BE49-F238E27FC236}">
+                <a16:creationId xmlns:a16="http://schemas.microsoft.com/office/drawing/2014/main" id="{11F18853-6F05-460E-4BFE-3121530005FE}"/>
+              </a:ext>
+            </a:extLst>
+          </p:cNvPr>
+          <p:cNvSpPr txBox="1"/>
+          <p:nvPr/>
+        </p:nvSpPr>
+        <p:spPr>
+          <a:xfrm>
+            <a:off x="394139" y="5100718"/>
+            <a:ext cx="1329558" cy="646331"/>
+          </a:xfrm>
+          <a:prstGeom prst="rect">
+            <a:avLst/>
+          </a:prstGeom>
+          <a:noFill/>
+        </p:spPr>
+        <p:txBody>
+          <a:bodyPr wrap="square" rtlCol="0">
+            <a:spAutoFit/>
+          </a:bodyPr>
+          <a:lstStyle/>
+          <a:p>
+            <a:r>
+              <a:rPr lang="en-US" sz="1200" b="1" dirty="0"/>
+              <a:t>Series X300</a:t>
+            </a:r>
+          </a:p>
+          <a:p>
+            <a:r>
+              <a:rPr lang="en-US" sz="1200" b="1" dirty="0"/>
+              <a:t>42,48" wide</a:t>
+            </a:r>
+            <a:endParaRPr lang="en-US" sz="1200" b="1" dirty="0">
+              <a:solidFill>
+                <a:srgbClr val="FF0000"/>
+              </a:solidFill>
+            </a:endParaRPr>
+          </a:p>
+          <a:p>
+            <a:r>
+              <a:rPr lang="en-US" sz="1200" b="1" dirty="0">
+                <a:solidFill>
+                  <a:srgbClr val="FF0000"/>
+                </a:solidFill>
+              </a:rPr>
+              <a:t>$3.6K - $7.3K</a:t>
+            </a:r>
+          </a:p>
+        </p:txBody>
+      </p:sp>
+      <p:sp>
+        <p:nvSpPr>
+          <p:cNvPr id="32" name="TextBox 31">
+            <a:extLst>
+              <a:ext uri="{FF2B5EF4-FFF2-40B4-BE49-F238E27FC236}">
+                <a16:creationId xmlns:a16="http://schemas.microsoft.com/office/drawing/2014/main" id="{10975E79-6DE1-02AC-0D61-FC672484C923}"/>
+              </a:ext>
+            </a:extLst>
+          </p:cNvPr>
+          <p:cNvSpPr txBox="1"/>
+          <p:nvPr/>
+        </p:nvSpPr>
+        <p:spPr>
+          <a:xfrm>
+            <a:off x="8525354" y="1741183"/>
+            <a:ext cx="1075846" cy="646331"/>
+          </a:xfrm>
+          <a:prstGeom prst="rect">
+            <a:avLst/>
+          </a:prstGeom>
+          <a:noFill/>
+        </p:spPr>
+        <p:txBody>
+          <a:bodyPr wrap="square" rtlCol="0">
+            <a:spAutoFit/>
+          </a:bodyPr>
+          <a:lstStyle/>
+          <a:p>
+            <a:r>
+              <a:rPr lang="en-US" sz="1200" b="1" dirty="0"/>
+              <a:t>Series X500</a:t>
+            </a:r>
+          </a:p>
+          <a:p>
+            <a:r>
+              <a:rPr lang="en-US" sz="1200" b="1" dirty="0"/>
+              <a:t>48,54" wide</a:t>
+            </a:r>
+            <a:endParaRPr lang="en-US" sz="1200" b="1" dirty="0">
+              <a:solidFill>
+                <a:srgbClr val="FF0000"/>
+              </a:solidFill>
+            </a:endParaRPr>
+          </a:p>
+          <a:p>
+            <a:r>
+              <a:rPr lang="en-US" sz="1200" b="1" dirty="0">
+                <a:solidFill>
+                  <a:srgbClr val="FF0000"/>
+                </a:solidFill>
+              </a:rPr>
+              <a:t>$7.5K - $10K</a:t>
+            </a:r>
+          </a:p>
+        </p:txBody>
+      </p:sp>
+      <p:sp>
+        <p:nvSpPr>
+          <p:cNvPr id="33" name="TextBox 32">
+            <a:extLst>
+              <a:ext uri="{FF2B5EF4-FFF2-40B4-BE49-F238E27FC236}">
+                <a16:creationId xmlns:a16="http://schemas.microsoft.com/office/drawing/2014/main" id="{9596110B-1807-2D74-947E-F0BDFACFC94E}"/>
+              </a:ext>
+            </a:extLst>
+          </p:cNvPr>
+          <p:cNvSpPr txBox="1"/>
+          <p:nvPr/>
+        </p:nvSpPr>
+        <p:spPr>
+          <a:xfrm>
+            <a:off x="8193576" y="3656745"/>
+            <a:ext cx="1739402" cy="1384995"/>
+          </a:xfrm>
+          <a:prstGeom prst="rect">
+            <a:avLst/>
+          </a:prstGeom>
+          <a:noFill/>
+        </p:spPr>
+        <p:txBody>
+          <a:bodyPr wrap="square" rtlCol="0">
+            <a:spAutoFit/>
+          </a:bodyPr>
+          <a:lstStyle/>
+          <a:p>
+            <a:pPr algn="l"/>
+            <a:r>
+              <a:rPr lang="en-US" sz="1200" b="1" i="0" dirty="0">
+                <a:effectLst/>
+                <a:latin typeface="jd_sans_probold"/>
+              </a:rPr>
+              <a:t>X700 Signature Series</a:t>
+            </a:r>
+          </a:p>
+          <a:p>
+            <a:r>
+              <a:rPr lang="en-US" sz="1200" b="1" dirty="0"/>
+              <a:t>48,54, 60" wide</a:t>
+            </a:r>
+          </a:p>
+          <a:p>
+            <a:r>
+              <a:rPr lang="en-US" sz="1200" b="1" dirty="0"/>
+              <a:t>gas or diesel</a:t>
+            </a:r>
+          </a:p>
+          <a:p>
+            <a:r>
+              <a:rPr lang="en-US" sz="1200" b="1" dirty="0"/>
+              <a:t>2 or 4-wheel drive</a:t>
+            </a:r>
+          </a:p>
+          <a:p>
+            <a:r>
+              <a:rPr lang="en-US" sz="1200" b="1" dirty="0">
+                <a:solidFill>
+                  <a:srgbClr val="FF0000"/>
+                </a:solidFill>
+              </a:rPr>
+              <a:t>$14K - $17K</a:t>
+            </a:r>
+            <a:endParaRPr lang="en-US" sz="1200" b="1" dirty="0"/>
+          </a:p>
+          <a:p>
+            <a:r>
+              <a:rPr lang="en-US" sz="1200" b="1" dirty="0"/>
+              <a:t>Best: X758, $17K </a:t>
+            </a:r>
+          </a:p>
+          <a:p>
+            <a:r>
+              <a:rPr lang="en-US" sz="1200" b="1" i="0" dirty="0">
+                <a:solidFill>
+                  <a:srgbClr val="1F1F1F"/>
+                </a:solidFill>
+                <a:effectLst/>
+                <a:latin typeface="Google Sans"/>
+              </a:rPr>
+              <a:t>weight 1,032 </a:t>
+            </a:r>
+            <a:r>
+              <a:rPr lang="en-US" sz="1200" b="1" i="0" dirty="0" err="1">
+                <a:solidFill>
+                  <a:srgbClr val="1F1F1F"/>
+                </a:solidFill>
+                <a:effectLst/>
+                <a:latin typeface="Google Sans"/>
+              </a:rPr>
+              <a:t>lbs</a:t>
+            </a:r>
+            <a:r>
+              <a:rPr lang="en-US" sz="1200" b="1" i="0" dirty="0">
+                <a:solidFill>
+                  <a:srgbClr val="1F1F1F"/>
+                </a:solidFill>
+                <a:effectLst/>
+                <a:latin typeface="Google Sans"/>
+              </a:rPr>
+              <a:t> (470kg)</a:t>
+            </a:r>
+            <a:endParaRPr lang="en-US" sz="1200" b="1" dirty="0"/>
+          </a:p>
+        </p:txBody>
+      </p:sp>
+      <p:pic>
+        <p:nvPicPr>
+          <p:cNvPr id="34" name="Picture 4" descr="studio rendering of a Z730">
+            <a:extLst>
+              <a:ext uri="{FF2B5EF4-FFF2-40B4-BE49-F238E27FC236}">
+                <a16:creationId xmlns:a16="http://schemas.microsoft.com/office/drawing/2014/main" id="{6D1404CB-EFA6-7EF7-66C7-8DF2F1AB786C}"/>
+              </a:ext>
+            </a:extLst>
+          </p:cNvPr>
+          <p:cNvPicPr>
+            <a:picLocks noChangeAspect="1" noChangeArrowheads="1"/>
+          </p:cNvPicPr>
+          <p:nvPr/>
+        </p:nvPicPr>
+        <p:blipFill rotWithShape="1">
+          <a:blip r:embed="rId4" cstate="email">
+            <a:extLst>
+              <a:ext uri="{28A0092B-C50C-407E-A947-70E740481C1C}">
+                <a14:useLocalDpi xmlns:a14="http://schemas.microsoft.com/office/drawing/2010/main"/>
+              </a:ext>
+            </a:extLst>
+          </a:blip>
+          <a:srcRect/>
+          <a:stretch/>
+        </p:blipFill>
+        <p:spPr bwMode="auto">
+          <a:xfrm>
+            <a:off x="10264756" y="3600147"/>
+            <a:ext cx="1739402" cy="1385047"/>
+          </a:xfrm>
+          <a:prstGeom prst="rect">
+            <a:avLst/>
+          </a:prstGeom>
+          <a:noFill/>
+          <a:extLst>
+            <a:ext uri="{909E8E84-426E-40DD-AFC4-6F175D3DCCD1}">
+              <a14:hiddenFill xmlns:a14="http://schemas.microsoft.com/office/drawing/2010/main">
+                <a:solidFill>
+                  <a:srgbClr val="FFFFFF"/>
+                </a:solidFill>
+              </a14:hiddenFill>
+            </a:ext>
+          </a:extLst>
+        </p:spPr>
+      </p:pic>
+      <p:pic>
+        <p:nvPicPr>
+          <p:cNvPr id="1030" name="Picture 6" descr="X590 Multi-Terrain Tractor, 54-inch deck">
+            <a:extLst>
+              <a:ext uri="{FF2B5EF4-FFF2-40B4-BE49-F238E27FC236}">
+                <a16:creationId xmlns:a16="http://schemas.microsoft.com/office/drawing/2014/main" id="{BAEA44D2-FDA6-2AB1-4EE0-5AE054D153ED}"/>
+              </a:ext>
+            </a:extLst>
+          </p:cNvPr>
+          <p:cNvPicPr>
+            <a:picLocks noChangeAspect="1" noChangeArrowheads="1"/>
+          </p:cNvPicPr>
+          <p:nvPr/>
+        </p:nvPicPr>
+        <p:blipFill>
+          <a:blip r:embed="rId5" cstate="email">
+            <a:extLst>
+              <a:ext uri="{28A0092B-C50C-407E-A947-70E740481C1C}">
+                <a14:useLocalDpi xmlns:a14="http://schemas.microsoft.com/office/drawing/2010/main"/>
+              </a:ext>
+            </a:extLst>
+          </a:blip>
+          <a:srcRect/>
+          <a:stretch>
+            <a:fillRect/>
+          </a:stretch>
+        </p:blipFill>
+        <p:spPr bwMode="auto">
+          <a:xfrm>
+            <a:off x="10469678" y="1444030"/>
+            <a:ext cx="1329558" cy="1107965"/>
+          </a:xfrm>
+          <a:prstGeom prst="rect">
+            <a:avLst/>
+          </a:prstGeom>
+          <a:noFill/>
+          <a:extLst>
+            <a:ext uri="{909E8E84-426E-40DD-AFC4-6F175D3DCCD1}">
+              <a14:hiddenFill xmlns:a14="http://schemas.microsoft.com/office/drawing/2010/main">
+                <a:solidFill>
+                  <a:srgbClr val="FFFFFF"/>
+                </a:solidFill>
+              </a14:hiddenFill>
+            </a:ext>
+          </a:extLst>
+        </p:spPr>
+      </p:pic>
+      <p:pic>
+        <p:nvPicPr>
+          <p:cNvPr id="1032" name="Picture 8" descr="X394 Tractor, 48-inch deck">
+            <a:extLst>
+              <a:ext uri="{FF2B5EF4-FFF2-40B4-BE49-F238E27FC236}">
+                <a16:creationId xmlns:a16="http://schemas.microsoft.com/office/drawing/2014/main" id="{FAF03351-F41D-4B23-AF1B-814459C202A0}"/>
+              </a:ext>
+            </a:extLst>
+          </p:cNvPr>
+          <p:cNvPicPr>
+            <a:picLocks noChangeAspect="1" noChangeArrowheads="1"/>
+          </p:cNvPicPr>
+          <p:nvPr/>
+        </p:nvPicPr>
+        <p:blipFill>
+          <a:blip r:embed="rId6" cstate="email">
+            <a:extLst>
+              <a:ext uri="{28A0092B-C50C-407E-A947-70E740481C1C}">
+                <a14:useLocalDpi xmlns:a14="http://schemas.microsoft.com/office/drawing/2010/main"/>
+              </a:ext>
+            </a:extLst>
+          </a:blip>
+          <a:srcRect/>
+          <a:stretch>
+            <a:fillRect/>
+          </a:stretch>
+        </p:blipFill>
+        <p:spPr bwMode="auto">
+          <a:xfrm>
+            <a:off x="1989370" y="4815146"/>
+            <a:ext cx="1503939" cy="1217474"/>
+          </a:xfrm>
+          <a:prstGeom prst="rect">
+            <a:avLst/>
+          </a:prstGeom>
+          <a:noFill/>
+          <a:extLst>
+            <a:ext uri="{909E8E84-426E-40DD-AFC4-6F175D3DCCD1}">
+              <a14:hiddenFill xmlns:a14="http://schemas.microsoft.com/office/drawing/2010/main">
+                <a:solidFill>
+                  <a:srgbClr val="FFFFFF"/>
+                </a:solidFill>
+              </a14:hiddenFill>
+            </a:ext>
+          </a:extLst>
+        </p:spPr>
+      </p:pic>
+      <p:pic>
+        <p:nvPicPr>
+          <p:cNvPr id="1034" name="Picture 10" descr="Studio image of a S240 with 48-in. Deck">
+            <a:extLst>
+              <a:ext uri="{FF2B5EF4-FFF2-40B4-BE49-F238E27FC236}">
+                <a16:creationId xmlns:a16="http://schemas.microsoft.com/office/drawing/2014/main" id="{E0531D71-6031-F709-1C0E-C99B6B672577}"/>
+              </a:ext>
+            </a:extLst>
+          </p:cNvPr>
+          <p:cNvPicPr>
+            <a:picLocks noChangeAspect="1" noChangeArrowheads="1"/>
+          </p:cNvPicPr>
+          <p:nvPr/>
+        </p:nvPicPr>
+        <p:blipFill rotWithShape="1">
+          <a:blip r:embed="rId7" cstate="email">
+            <a:extLst>
+              <a:ext uri="{28A0092B-C50C-407E-A947-70E740481C1C}">
+                <a14:useLocalDpi xmlns:a14="http://schemas.microsoft.com/office/drawing/2010/main"/>
+              </a:ext>
+            </a:extLst>
+          </a:blip>
+          <a:srcRect/>
+          <a:stretch/>
+        </p:blipFill>
+        <p:spPr bwMode="auto">
+          <a:xfrm>
+            <a:off x="1927243" y="2999982"/>
+            <a:ext cx="1614429" cy="1200330"/>
+          </a:xfrm>
+          <a:prstGeom prst="rect">
+            <a:avLst/>
+          </a:prstGeom>
+          <a:noFill/>
+          <a:extLst>
+            <a:ext uri="{909E8E84-426E-40DD-AFC4-6F175D3DCCD1}">
+              <a14:hiddenFill xmlns:a14="http://schemas.microsoft.com/office/drawing/2010/main">
+                <a:solidFill>
+                  <a:srgbClr val="FFFFFF"/>
+                </a:solidFill>
+              </a14:hiddenFill>
+            </a:ext>
+          </a:extLst>
+        </p:spPr>
+      </p:pic>
+    </p:spTree>
+    <p:extLst>
+      <p:ext uri="{BB962C8B-B14F-4D97-AF65-F5344CB8AC3E}">
+        <p14:creationId xmlns:p14="http://schemas.microsoft.com/office/powerpoint/2010/main" val="3886189577"/>
       </p:ext>
     </p:extLst>
   </p:cSld>
@@ -7667,6 +9028,2611 @@
   <p:cSld>
     <p:spTree>
       <p:nvGrpSpPr>
+        <p:cNvPr id="1" name="Shape 53"/>
+        <p:cNvGrpSpPr/>
+        <p:nvPr/>
+      </p:nvGrpSpPr>
+      <p:grpSpPr>
+        <a:xfrm>
+          <a:off x="0" y="0"/>
+          <a:ext cx="0" cy="0"/>
+          <a:chOff x="0" y="0"/>
+          <a:chExt cx="0" cy="0"/>
+        </a:xfrm>
+      </p:grpSpPr>
+      <p:sp>
+        <p:nvSpPr>
+          <p:cNvPr id="54" name="Google Shape;54;p13"/>
+          <p:cNvSpPr txBox="1"/>
+          <p:nvPr/>
+        </p:nvSpPr>
+        <p:spPr>
+          <a:xfrm>
+            <a:off x="223367" y="204767"/>
+            <a:ext cx="4262400" cy="475914"/>
+          </a:xfrm>
+          <a:prstGeom prst="rect">
+            <a:avLst/>
+          </a:prstGeom>
+          <a:noFill/>
+          <a:ln>
+            <a:noFill/>
+          </a:ln>
+        </p:spPr>
+        <p:txBody>
+          <a:bodyPr spcFirstLastPara="1" wrap="square" lIns="12167" tIns="12167" rIns="12167" bIns="12167" anchor="t" anchorCtr="0">
+            <a:spAutoFit/>
+          </a:bodyPr>
+          <a:lstStyle/>
+          <a:p>
+            <a:r>
+              <a:rPr lang="en" sz="2933" b="1">
+                <a:solidFill>
+                  <a:schemeClr val="dk2"/>
+                </a:solidFill>
+                <a:latin typeface="Calibri"/>
+                <a:ea typeface="Calibri"/>
+                <a:cs typeface="Calibri"/>
+                <a:sym typeface="Calibri"/>
+              </a:rPr>
+              <a:t>Tractor Not Starting</a:t>
+            </a:r>
+            <a:endParaRPr sz="2933" b="1">
+              <a:solidFill>
+                <a:schemeClr val="dk2"/>
+              </a:solidFill>
+              <a:latin typeface="Calibri"/>
+              <a:ea typeface="Calibri"/>
+              <a:cs typeface="Calibri"/>
+              <a:sym typeface="Calibri"/>
+            </a:endParaRPr>
+          </a:p>
+        </p:txBody>
+      </p:sp>
+      <p:sp>
+        <p:nvSpPr>
+          <p:cNvPr id="55" name="Google Shape;55;p13"/>
+          <p:cNvSpPr txBox="1"/>
+          <p:nvPr/>
+        </p:nvSpPr>
+        <p:spPr>
+          <a:xfrm>
+            <a:off x="83667" y="768033"/>
+            <a:ext cx="5840000" cy="3862610"/>
+          </a:xfrm>
+          <a:prstGeom prst="rect">
+            <a:avLst/>
+          </a:prstGeom>
+          <a:solidFill>
+            <a:srgbClr val="FFF2CC"/>
+          </a:solidFill>
+          <a:ln w="9525" cap="flat" cmpd="sng">
+            <a:solidFill>
+              <a:srgbClr val="FF0000"/>
+            </a:solidFill>
+            <a:prstDash val="solid"/>
+            <a:round/>
+            <a:headEnd type="none" w="sm" len="sm"/>
+            <a:tailEnd type="none" w="sm" len="sm"/>
+          </a:ln>
+        </p:spPr>
+        <p:txBody>
+          <a:bodyPr spcFirstLastPara="1" wrap="square" lIns="12167" tIns="12167" rIns="12167" bIns="12167" anchor="t" anchorCtr="0">
+            <a:spAutoFit/>
+          </a:bodyPr>
+          <a:lstStyle/>
+          <a:p>
+            <a:r>
+              <a:rPr lang="en" sz="1467" b="1">
+                <a:solidFill>
+                  <a:srgbClr val="FF0000"/>
+                </a:solidFill>
+                <a:latin typeface="Calibri"/>
+                <a:ea typeface="Calibri"/>
+                <a:cs typeface="Calibri"/>
+                <a:sym typeface="Calibri"/>
+              </a:rPr>
+              <a:t>Most common reasons a JD 425 won’t start after 8 months:</a:t>
+            </a:r>
+            <a:endParaRPr sz="1467" b="1">
+              <a:solidFill>
+                <a:srgbClr val="FF0000"/>
+              </a:solidFill>
+              <a:latin typeface="Calibri"/>
+              <a:ea typeface="Calibri"/>
+              <a:cs typeface="Calibri"/>
+              <a:sym typeface="Calibri"/>
+            </a:endParaRPr>
+          </a:p>
+          <a:p>
+            <a:pPr marL="228594" indent="-169329">
+              <a:buClr>
+                <a:schemeClr val="dk2"/>
+              </a:buClr>
+              <a:buSzPts val="1100"/>
+              <a:buFont typeface="Calibri"/>
+              <a:buChar char="●"/>
+            </a:pPr>
+            <a:r>
+              <a:rPr lang="en" sz="1467">
+                <a:solidFill>
+                  <a:schemeClr val="dk2"/>
+                </a:solidFill>
+                <a:latin typeface="Calibri"/>
+                <a:ea typeface="Calibri"/>
+                <a:cs typeface="Calibri"/>
+                <a:sym typeface="Calibri"/>
+              </a:rPr>
+              <a:t>1. Old/stale gas - Drain tank and carb, refill with fresh fuel + stabilizer</a:t>
+            </a:r>
+            <a:endParaRPr sz="1467">
+              <a:solidFill>
+                <a:schemeClr val="dk2"/>
+              </a:solidFill>
+              <a:latin typeface="Calibri"/>
+              <a:ea typeface="Calibri"/>
+              <a:cs typeface="Calibri"/>
+              <a:sym typeface="Calibri"/>
+            </a:endParaRPr>
+          </a:p>
+          <a:p>
+            <a:pPr marL="228594" indent="-169329">
+              <a:buClr>
+                <a:schemeClr val="dk2"/>
+              </a:buClr>
+              <a:buSzPts val="1100"/>
+              <a:buFont typeface="Calibri"/>
+              <a:buChar char="●"/>
+            </a:pPr>
+            <a:r>
+              <a:rPr lang="en" sz="1467">
+                <a:solidFill>
+                  <a:schemeClr val="dk2"/>
+                </a:solidFill>
+                <a:latin typeface="Calibri"/>
+                <a:ea typeface="Calibri"/>
+                <a:cs typeface="Calibri"/>
+                <a:sym typeface="Calibri"/>
+              </a:rPr>
+              <a:t>2. Gummed carburetor - remove carb, clean jets and passages with carb cleaner/compressed air</a:t>
+            </a:r>
+            <a:endParaRPr sz="1467">
+              <a:solidFill>
+                <a:schemeClr val="dk2"/>
+              </a:solidFill>
+              <a:latin typeface="Calibri"/>
+              <a:ea typeface="Calibri"/>
+              <a:cs typeface="Calibri"/>
+              <a:sym typeface="Calibri"/>
+            </a:endParaRPr>
+          </a:p>
+          <a:p>
+            <a:pPr marL="228594" indent="-169329">
+              <a:buClr>
+                <a:schemeClr val="dk2"/>
+              </a:buClr>
+              <a:buSzPts val="1100"/>
+              <a:buFont typeface="Calibri"/>
+              <a:buChar char="●"/>
+            </a:pPr>
+            <a:r>
+              <a:rPr lang="en" sz="1467">
+                <a:solidFill>
+                  <a:schemeClr val="dk2"/>
+                </a:solidFill>
+                <a:latin typeface="Calibri"/>
+                <a:ea typeface="Calibri"/>
+                <a:cs typeface="Calibri"/>
+                <a:sym typeface="Calibri"/>
+              </a:rPr>
+              <a:t>3. Weak battery, sulfated contacts - cldan, charge, test</a:t>
+            </a:r>
+            <a:endParaRPr sz="1467">
+              <a:solidFill>
+                <a:schemeClr val="dk2"/>
+              </a:solidFill>
+              <a:latin typeface="Calibri"/>
+              <a:ea typeface="Calibri"/>
+              <a:cs typeface="Calibri"/>
+              <a:sym typeface="Calibri"/>
+            </a:endParaRPr>
+          </a:p>
+          <a:p>
+            <a:pPr marL="228594" indent="-169329">
+              <a:buClr>
+                <a:schemeClr val="dk2"/>
+              </a:buClr>
+              <a:buSzPts val="1100"/>
+              <a:buFont typeface="Calibri"/>
+              <a:buChar char="●"/>
+            </a:pPr>
+            <a:r>
+              <a:rPr lang="en" sz="1467">
+                <a:solidFill>
+                  <a:schemeClr val="dk2"/>
+                </a:solidFill>
+                <a:latin typeface="Calibri"/>
+                <a:ea typeface="Calibri"/>
+                <a:cs typeface="Calibri"/>
+                <a:sym typeface="Calibri"/>
+              </a:rPr>
+              <a:t>4. Corroded/loose battery cables/grounds - wire‑brush clean, tighten</a:t>
+            </a:r>
+            <a:endParaRPr sz="1467">
+              <a:solidFill>
+                <a:schemeClr val="dk2"/>
+              </a:solidFill>
+              <a:latin typeface="Calibri"/>
+              <a:ea typeface="Calibri"/>
+              <a:cs typeface="Calibri"/>
+              <a:sym typeface="Calibri"/>
+            </a:endParaRPr>
+          </a:p>
+          <a:p>
+            <a:pPr marL="228594" indent="-169329">
+              <a:buClr>
+                <a:schemeClr val="dk2"/>
+              </a:buClr>
+              <a:buSzPts val="1100"/>
+              <a:buFont typeface="Calibri"/>
+              <a:buChar char="●"/>
+            </a:pPr>
+            <a:r>
+              <a:rPr lang="en" sz="1467">
+                <a:solidFill>
+                  <a:schemeClr val="dk2"/>
+                </a:solidFill>
+                <a:latin typeface="Calibri"/>
+                <a:ea typeface="Calibri"/>
+                <a:cs typeface="Calibri"/>
+                <a:sym typeface="Calibri"/>
+              </a:rPr>
+              <a:t>5. Fuel shutoff/line/filter restriction - open shutoff, replace fuel filter,  inspect/replace cracked or collapsed lines,</a:t>
+            </a:r>
+            <a:br>
+              <a:rPr lang="en" sz="1467">
+                <a:solidFill>
+                  <a:schemeClr val="dk2"/>
+                </a:solidFill>
+                <a:latin typeface="Calibri"/>
+                <a:ea typeface="Calibri"/>
+                <a:cs typeface="Calibri"/>
+                <a:sym typeface="Calibri"/>
+              </a:rPr>
+            </a:br>
+            <a:r>
+              <a:rPr lang="en" sz="1467">
+                <a:solidFill>
+                  <a:schemeClr val="dk2"/>
+                </a:solidFill>
+                <a:latin typeface="Calibri"/>
+                <a:ea typeface="Calibri"/>
+                <a:cs typeface="Calibri"/>
+                <a:sym typeface="Calibri"/>
+              </a:rPr>
+              <a:t>carburetor's fuel cut-off solenoid failing to retract properly</a:t>
+            </a:r>
+            <a:endParaRPr sz="1467">
+              <a:solidFill>
+                <a:schemeClr val="dk2"/>
+              </a:solidFill>
+              <a:latin typeface="Calibri"/>
+              <a:ea typeface="Calibri"/>
+              <a:cs typeface="Calibri"/>
+              <a:sym typeface="Calibri"/>
+            </a:endParaRPr>
+          </a:p>
+          <a:p>
+            <a:pPr marL="228594" indent="-169329">
+              <a:buClr>
+                <a:schemeClr val="dk2"/>
+              </a:buClr>
+              <a:buSzPts val="1100"/>
+              <a:buFont typeface="Calibri"/>
+              <a:buChar char="●"/>
+            </a:pPr>
+            <a:r>
+              <a:rPr lang="en" sz="1467">
+                <a:solidFill>
+                  <a:schemeClr val="dk2"/>
+                </a:solidFill>
+                <a:latin typeface="Calibri"/>
+                <a:ea typeface="Calibri"/>
+                <a:cs typeface="Calibri"/>
+                <a:sym typeface="Calibri"/>
+              </a:rPr>
+              <a:t>6. Choke/throttle or linkage issue - verify correct positions, </a:t>
+            </a:r>
+            <a:br>
+              <a:rPr lang="en" sz="1467">
+                <a:solidFill>
+                  <a:schemeClr val="dk2"/>
+                </a:solidFill>
+                <a:latin typeface="Calibri"/>
+                <a:ea typeface="Calibri"/>
+                <a:cs typeface="Calibri"/>
+                <a:sym typeface="Calibri"/>
+              </a:rPr>
+            </a:br>
+            <a:r>
+              <a:rPr lang="en" sz="1467">
+                <a:solidFill>
+                  <a:schemeClr val="dk2"/>
+                </a:solidFill>
+                <a:latin typeface="Calibri"/>
+                <a:ea typeface="Calibri"/>
+                <a:cs typeface="Calibri"/>
+                <a:sym typeface="Calibri"/>
+              </a:rPr>
+              <a:t>lube linkages, adjust/repair cables as needed</a:t>
+            </a:r>
+            <a:endParaRPr sz="1467">
+              <a:solidFill>
+                <a:schemeClr val="dk2"/>
+              </a:solidFill>
+              <a:latin typeface="Calibri"/>
+              <a:ea typeface="Calibri"/>
+              <a:cs typeface="Calibri"/>
+              <a:sym typeface="Calibri"/>
+            </a:endParaRPr>
+          </a:p>
+          <a:p>
+            <a:pPr marL="228594" indent="-169329">
+              <a:buClr>
+                <a:schemeClr val="dk2"/>
+              </a:buClr>
+              <a:buSzPts val="1100"/>
+              <a:buFont typeface="Calibri"/>
+              <a:buChar char="●"/>
+            </a:pPr>
+            <a:r>
+              <a:rPr lang="en" sz="1467">
+                <a:solidFill>
+                  <a:schemeClr val="dk2"/>
+                </a:solidFill>
+                <a:latin typeface="Calibri"/>
+                <a:ea typeface="Calibri"/>
+                <a:cs typeface="Calibri"/>
+                <a:sym typeface="Calibri"/>
+              </a:rPr>
+              <a:t>7. Fouled/worn spark plugs - clean or install new</a:t>
+            </a:r>
+            <a:endParaRPr sz="1467">
+              <a:solidFill>
+                <a:schemeClr val="dk2"/>
+              </a:solidFill>
+              <a:latin typeface="Calibri"/>
+              <a:ea typeface="Calibri"/>
+              <a:cs typeface="Calibri"/>
+              <a:sym typeface="Calibri"/>
+            </a:endParaRPr>
+          </a:p>
+          <a:p>
+            <a:pPr marL="228594" indent="-169329">
+              <a:buClr>
+                <a:schemeClr val="dk2"/>
+              </a:buClr>
+              <a:buSzPts val="1100"/>
+              <a:buFont typeface="Calibri"/>
+              <a:buChar char="●"/>
+            </a:pPr>
+            <a:r>
+              <a:rPr lang="en" sz="1467">
+                <a:solidFill>
+                  <a:schemeClr val="dk2"/>
+                </a:solidFill>
+                <a:latin typeface="Calibri"/>
+                <a:ea typeface="Calibri"/>
+                <a:cs typeface="Calibri"/>
+                <a:sym typeface="Calibri"/>
+              </a:rPr>
+              <a:t>8. Ignition or safety interlock issue - check fuses, test/bypass safety switches or wiring, time-delay module, ignitor (CDI/ignition module), Ignition switch module, ...</a:t>
+            </a:r>
+            <a:endParaRPr sz="1467">
+              <a:solidFill>
+                <a:schemeClr val="dk2"/>
+              </a:solidFill>
+              <a:latin typeface="Calibri"/>
+              <a:ea typeface="Calibri"/>
+              <a:cs typeface="Calibri"/>
+              <a:sym typeface="Calibri"/>
+            </a:endParaRPr>
+          </a:p>
+          <a:p>
+            <a:pPr marL="228594" indent="-169329">
+              <a:buClr>
+                <a:schemeClr val="dk2"/>
+              </a:buClr>
+              <a:buSzPts val="1100"/>
+              <a:buFont typeface="Calibri"/>
+              <a:buChar char="●"/>
+            </a:pPr>
+            <a:r>
+              <a:rPr lang="en" sz="1467">
+                <a:solidFill>
+                  <a:schemeClr val="dk2"/>
+                </a:solidFill>
+                <a:latin typeface="Calibri"/>
+                <a:ea typeface="Calibri"/>
+                <a:cs typeface="Calibri"/>
+                <a:sym typeface="Calibri"/>
+              </a:rPr>
+              <a:t>9. Air intake or filter blocked - clean</a:t>
+            </a:r>
+            <a:endParaRPr sz="1467">
+              <a:solidFill>
+                <a:schemeClr val="dk2"/>
+              </a:solidFill>
+              <a:latin typeface="Calibri"/>
+              <a:ea typeface="Calibri"/>
+              <a:cs typeface="Calibri"/>
+              <a:sym typeface="Calibri"/>
+            </a:endParaRPr>
+          </a:p>
+          <a:p>
+            <a:pPr marL="228594" indent="-169329">
+              <a:buClr>
+                <a:schemeClr val="dk2"/>
+              </a:buClr>
+              <a:buSzPts val="1100"/>
+              <a:buFont typeface="Calibri"/>
+              <a:buChar char="●"/>
+            </a:pPr>
+            <a:r>
+              <a:rPr lang="en" sz="1467">
+                <a:solidFill>
+                  <a:schemeClr val="dk2"/>
+                </a:solidFill>
+                <a:latin typeface="Calibri"/>
+                <a:ea typeface="Calibri"/>
+                <a:cs typeface="Calibri"/>
+                <a:sym typeface="Calibri"/>
+              </a:rPr>
+              <a:t>10. Rodent‑damaged wiring, fuse, or switch - inspect, check/replace</a:t>
+            </a:r>
+            <a:endParaRPr sz="1467">
+              <a:solidFill>
+                <a:schemeClr val="dk2"/>
+              </a:solidFill>
+              <a:latin typeface="Calibri"/>
+              <a:ea typeface="Calibri"/>
+              <a:cs typeface="Calibri"/>
+              <a:sym typeface="Calibri"/>
+            </a:endParaRPr>
+          </a:p>
+        </p:txBody>
+      </p:sp>
+      <p:sp>
+        <p:nvSpPr>
+          <p:cNvPr id="56" name="Google Shape;56;p13"/>
+          <p:cNvSpPr txBox="1"/>
+          <p:nvPr/>
+        </p:nvSpPr>
+        <p:spPr>
+          <a:xfrm>
+            <a:off x="7092033" y="133968"/>
+            <a:ext cx="5021600" cy="1379173"/>
+          </a:xfrm>
+          <a:prstGeom prst="rect">
+            <a:avLst/>
+          </a:prstGeom>
+          <a:solidFill>
+            <a:srgbClr val="FFF2CC"/>
+          </a:solidFill>
+          <a:ln w="9525" cap="flat" cmpd="sng">
+            <a:solidFill>
+              <a:srgbClr val="FF0000"/>
+            </a:solidFill>
+            <a:prstDash val="solid"/>
+            <a:round/>
+            <a:headEnd type="none" w="sm" len="sm"/>
+            <a:tailEnd type="none" w="sm" len="sm"/>
+          </a:ln>
+        </p:spPr>
+        <p:txBody>
+          <a:bodyPr spcFirstLastPara="1" wrap="square" lIns="12167" tIns="12167" rIns="12167" bIns="12167" anchor="t" anchorCtr="0">
+            <a:spAutoFit/>
+          </a:bodyPr>
+          <a:lstStyle/>
+          <a:p>
+            <a:pPr marL="228594" indent="-169329">
+              <a:buClr>
+                <a:srgbClr val="FF0000"/>
+              </a:buClr>
+              <a:buSzPts val="1100"/>
+              <a:buFont typeface="Calibri"/>
+              <a:buChar char="●"/>
+            </a:pPr>
+            <a:r>
+              <a:rPr lang="en" sz="1467" b="1">
+                <a:solidFill>
+                  <a:srgbClr val="FF0000"/>
+                </a:solidFill>
+                <a:latin typeface="Calibri"/>
+                <a:ea typeface="Calibri"/>
+                <a:cs typeface="Calibri"/>
+                <a:sym typeface="Calibri"/>
+              </a:rPr>
+              <a:t>Using starting fluid</a:t>
+            </a:r>
+            <a:endParaRPr sz="1467" b="1">
+              <a:solidFill>
+                <a:srgbClr val="FF0000"/>
+              </a:solidFill>
+              <a:latin typeface="Calibri"/>
+              <a:ea typeface="Calibri"/>
+              <a:cs typeface="Calibri"/>
+              <a:sym typeface="Calibri"/>
+            </a:endParaRPr>
+          </a:p>
+          <a:p>
+            <a:pPr marL="228594" indent="-169329">
+              <a:buClr>
+                <a:schemeClr val="dk2"/>
+              </a:buClr>
+              <a:buSzPts val="1100"/>
+              <a:buFont typeface="Calibri"/>
+              <a:buChar char="●"/>
+            </a:pPr>
+            <a:r>
+              <a:rPr lang="en" sz="1467">
+                <a:solidFill>
+                  <a:schemeClr val="dk2"/>
+                </a:solidFill>
+                <a:latin typeface="Calibri"/>
+                <a:ea typeface="Calibri"/>
+                <a:cs typeface="Calibri"/>
+                <a:sym typeface="Calibri"/>
+              </a:rPr>
+              <a:t>Spray starting fluid for 2-3 sec into air intake (remove filter) - and then try to start. </a:t>
+            </a:r>
+            <a:endParaRPr sz="1467">
+              <a:solidFill>
+                <a:schemeClr val="dk2"/>
+              </a:solidFill>
+              <a:latin typeface="Calibri"/>
+              <a:ea typeface="Calibri"/>
+              <a:cs typeface="Calibri"/>
+              <a:sym typeface="Calibri"/>
+            </a:endParaRPr>
+          </a:p>
+          <a:p>
+            <a:pPr marL="228594" indent="-169329">
+              <a:buClr>
+                <a:schemeClr val="dk2"/>
+              </a:buClr>
+              <a:buSzPts val="1100"/>
+              <a:buFont typeface="Calibri"/>
+              <a:buChar char="●"/>
+            </a:pPr>
+            <a:r>
+              <a:rPr lang="en" sz="1467">
+                <a:solidFill>
+                  <a:schemeClr val="dk2"/>
+                </a:solidFill>
+                <a:latin typeface="Calibri"/>
+                <a:ea typeface="Calibri"/>
+                <a:cs typeface="Calibri"/>
+                <a:sym typeface="Calibri"/>
+              </a:rPr>
+              <a:t>If it starts briefly and dies, that’s a strong sign you have a fuel delivery problem (carb, fuel line, filter, or stale gas) rather than an ignition problem</a:t>
+            </a:r>
+            <a:endParaRPr sz="1467">
+              <a:solidFill>
+                <a:schemeClr val="dk2"/>
+              </a:solidFill>
+              <a:latin typeface="Calibri"/>
+              <a:ea typeface="Calibri"/>
+              <a:cs typeface="Calibri"/>
+              <a:sym typeface="Calibri"/>
+            </a:endParaRPr>
+          </a:p>
+        </p:txBody>
+      </p:sp>
+      <p:sp>
+        <p:nvSpPr>
+          <p:cNvPr id="57" name="Google Shape;57;p13"/>
+          <p:cNvSpPr txBox="1"/>
+          <p:nvPr/>
+        </p:nvSpPr>
+        <p:spPr>
+          <a:xfrm>
+            <a:off x="7092033" y="1569068"/>
+            <a:ext cx="5021600" cy="927639"/>
+          </a:xfrm>
+          <a:prstGeom prst="rect">
+            <a:avLst/>
+          </a:prstGeom>
+          <a:solidFill>
+            <a:srgbClr val="FFF2CC"/>
+          </a:solidFill>
+          <a:ln w="9525" cap="flat" cmpd="sng">
+            <a:solidFill>
+              <a:srgbClr val="FF0000"/>
+            </a:solidFill>
+            <a:prstDash val="solid"/>
+            <a:round/>
+            <a:headEnd type="none" w="sm" len="sm"/>
+            <a:tailEnd type="none" w="sm" len="sm"/>
+          </a:ln>
+        </p:spPr>
+        <p:txBody>
+          <a:bodyPr spcFirstLastPara="1" wrap="square" lIns="12167" tIns="12167" rIns="12167" bIns="12167" anchor="t" anchorCtr="0">
+            <a:spAutoFit/>
+          </a:bodyPr>
+          <a:lstStyle/>
+          <a:p>
+            <a:pPr marL="228594" indent="-169329">
+              <a:buClr>
+                <a:schemeClr val="dk2"/>
+              </a:buClr>
+              <a:buSzPts val="1100"/>
+              <a:buFont typeface="Calibri"/>
+              <a:buChar char="●"/>
+            </a:pPr>
+            <a:r>
+              <a:rPr lang="en" sz="1467">
+                <a:solidFill>
+                  <a:schemeClr val="dk2"/>
+                </a:solidFill>
+                <a:latin typeface="Calibri"/>
+                <a:ea typeface="Calibri"/>
+                <a:cs typeface="Calibri"/>
+                <a:sym typeface="Calibri"/>
+              </a:rPr>
+              <a:t>No spark - change the "time-delay" module - provides buffer time delay to avoid shutting off from inconsistent contacts</a:t>
+            </a:r>
+            <a:endParaRPr sz="1467">
+              <a:solidFill>
+                <a:schemeClr val="dk2"/>
+              </a:solidFill>
+              <a:latin typeface="Calibri"/>
+              <a:ea typeface="Calibri"/>
+              <a:cs typeface="Calibri"/>
+              <a:sym typeface="Calibri"/>
+            </a:endParaRPr>
+          </a:p>
+          <a:p>
+            <a:pPr marL="228594" indent="-169329">
+              <a:buClr>
+                <a:schemeClr val="dk2"/>
+              </a:buClr>
+              <a:buSzPts val="1100"/>
+              <a:buFont typeface="Calibri"/>
+              <a:buChar char="●"/>
+            </a:pPr>
+            <a:r>
+              <a:rPr lang="en" sz="1467" u="sng">
+                <a:solidFill>
+                  <a:schemeClr val="hlink"/>
+                </a:solidFill>
+                <a:latin typeface="Calibri"/>
+                <a:ea typeface="Calibri"/>
+                <a:cs typeface="Calibri"/>
+                <a:sym typeface="Calibri"/>
+                <a:hlinkClick r:id="rId3"/>
+              </a:rPr>
+              <a:t>https://www.youtube.com/watch?v=AzRyIVRD-zQ</a:t>
+            </a:r>
+            <a:r>
+              <a:rPr lang="en" sz="1467">
+                <a:solidFill>
+                  <a:schemeClr val="dk2"/>
+                </a:solidFill>
+                <a:latin typeface="Calibri"/>
+                <a:ea typeface="Calibri"/>
+                <a:cs typeface="Calibri"/>
+                <a:sym typeface="Calibri"/>
+              </a:rPr>
+              <a:t> </a:t>
+            </a:r>
+            <a:endParaRPr sz="1467">
+              <a:solidFill>
+                <a:schemeClr val="dk2"/>
+              </a:solidFill>
+              <a:latin typeface="Calibri"/>
+              <a:ea typeface="Calibri"/>
+              <a:cs typeface="Calibri"/>
+              <a:sym typeface="Calibri"/>
+            </a:endParaRPr>
+          </a:p>
+          <a:p>
+            <a:pPr marL="228594" indent="-169329">
+              <a:buClr>
+                <a:schemeClr val="dk2"/>
+              </a:buClr>
+              <a:buSzPts val="1100"/>
+              <a:buFont typeface="Calibri"/>
+              <a:buChar char="●"/>
+            </a:pPr>
+            <a:r>
+              <a:rPr lang="en" sz="1467" u="sng">
+                <a:solidFill>
+                  <a:schemeClr val="hlink"/>
+                </a:solidFill>
+                <a:latin typeface="Calibri"/>
+                <a:ea typeface="Calibri"/>
+                <a:cs typeface="Calibri"/>
+                <a:sym typeface="Calibri"/>
+                <a:hlinkClick r:id="rId4"/>
+              </a:rPr>
+              <a:t>https://www.amazon.com/dp/B07VPC328F</a:t>
+            </a:r>
+            <a:r>
+              <a:rPr lang="en" sz="1467">
+                <a:solidFill>
+                  <a:schemeClr val="dk2"/>
+                </a:solidFill>
+                <a:latin typeface="Calibri"/>
+                <a:ea typeface="Calibri"/>
+                <a:cs typeface="Calibri"/>
+                <a:sym typeface="Calibri"/>
+              </a:rPr>
+              <a:t> - amazon $14</a:t>
+            </a:r>
+            <a:endParaRPr sz="1467">
+              <a:solidFill>
+                <a:schemeClr val="dk2"/>
+              </a:solidFill>
+              <a:latin typeface="Calibri"/>
+              <a:ea typeface="Calibri"/>
+              <a:cs typeface="Calibri"/>
+              <a:sym typeface="Calibri"/>
+            </a:endParaRPr>
+          </a:p>
+        </p:txBody>
+      </p:sp>
+      <p:sp>
+        <p:nvSpPr>
+          <p:cNvPr id="58" name="Google Shape;58;p13"/>
+          <p:cNvSpPr txBox="1"/>
+          <p:nvPr/>
+        </p:nvSpPr>
+        <p:spPr>
+          <a:xfrm>
+            <a:off x="7092033" y="2648099"/>
+            <a:ext cx="5021600" cy="1153407"/>
+          </a:xfrm>
+          <a:prstGeom prst="rect">
+            <a:avLst/>
+          </a:prstGeom>
+          <a:solidFill>
+            <a:srgbClr val="FFF2CC"/>
+          </a:solidFill>
+          <a:ln w="9525" cap="flat" cmpd="sng">
+            <a:solidFill>
+              <a:srgbClr val="FF0000"/>
+            </a:solidFill>
+            <a:prstDash val="solid"/>
+            <a:round/>
+            <a:headEnd type="none" w="sm" len="sm"/>
+            <a:tailEnd type="none" w="sm" len="sm"/>
+          </a:ln>
+        </p:spPr>
+        <p:txBody>
+          <a:bodyPr spcFirstLastPara="1" wrap="square" lIns="12167" tIns="12167" rIns="12167" bIns="12167" anchor="t" anchorCtr="0">
+            <a:spAutoFit/>
+          </a:bodyPr>
+          <a:lstStyle/>
+          <a:p>
+            <a:pPr marL="228594" indent="-169329">
+              <a:buClr>
+                <a:srgbClr val="FF0000"/>
+              </a:buClr>
+              <a:buSzPts val="1100"/>
+              <a:buFont typeface="Calibri"/>
+              <a:buChar char="●"/>
+            </a:pPr>
+            <a:r>
+              <a:rPr lang="en" sz="1467" b="1">
+                <a:solidFill>
+                  <a:srgbClr val="FF0000"/>
+                </a:solidFill>
+                <a:latin typeface="Calibri"/>
+                <a:ea typeface="Calibri"/>
+                <a:cs typeface="Calibri"/>
+                <a:sym typeface="Calibri"/>
+              </a:rPr>
+              <a:t>Bought on amazon:</a:t>
+            </a:r>
+            <a:endParaRPr sz="1467" b="1">
+              <a:solidFill>
+                <a:srgbClr val="FF0000"/>
+              </a:solidFill>
+              <a:latin typeface="Calibri"/>
+              <a:ea typeface="Calibri"/>
+              <a:cs typeface="Calibri"/>
+              <a:sym typeface="Calibri"/>
+            </a:endParaRPr>
+          </a:p>
+          <a:p>
+            <a:pPr marL="228594" indent="-169329">
+              <a:buClr>
+                <a:schemeClr val="dk2"/>
+              </a:buClr>
+              <a:buSzPts val="1100"/>
+              <a:buFont typeface="Calibri"/>
+              <a:buChar char="●"/>
+            </a:pPr>
+            <a:r>
+              <a:rPr lang="en" sz="1467">
+                <a:solidFill>
+                  <a:schemeClr val="dk2"/>
+                </a:solidFill>
+                <a:latin typeface="Calibri"/>
+                <a:ea typeface="Calibri"/>
+                <a:cs typeface="Calibri"/>
+                <a:sym typeface="Calibri"/>
+              </a:rPr>
+              <a:t>Lisle 20580 InLine Spark Tester w/Coil On Plug Wire</a:t>
+            </a:r>
+            <a:endParaRPr sz="1467">
+              <a:solidFill>
+                <a:schemeClr val="dk2"/>
+              </a:solidFill>
+              <a:latin typeface="Calibri"/>
+              <a:ea typeface="Calibri"/>
+              <a:cs typeface="Calibri"/>
+              <a:sym typeface="Calibri"/>
+            </a:endParaRPr>
+          </a:p>
+          <a:p>
+            <a:pPr marL="228594" indent="-169329">
+              <a:buClr>
+                <a:schemeClr val="dk2"/>
+              </a:buClr>
+              <a:buSzPts val="1100"/>
+              <a:buFont typeface="Calibri"/>
+              <a:buChar char="●"/>
+            </a:pPr>
+            <a:r>
+              <a:rPr lang="en" sz="1467">
+                <a:solidFill>
+                  <a:schemeClr val="dk2"/>
+                </a:solidFill>
+                <a:latin typeface="Calibri"/>
+                <a:ea typeface="Calibri"/>
+                <a:cs typeface="Calibri"/>
+                <a:sym typeface="Calibri"/>
+              </a:rPr>
+              <a:t>Carb and Choke Cleaner Jet Spray  (spray can)</a:t>
+            </a:r>
+            <a:endParaRPr sz="1467">
+              <a:solidFill>
+                <a:schemeClr val="dk2"/>
+              </a:solidFill>
+              <a:latin typeface="Calibri"/>
+              <a:ea typeface="Calibri"/>
+              <a:cs typeface="Calibri"/>
+              <a:sym typeface="Calibri"/>
+            </a:endParaRPr>
+          </a:p>
+          <a:p>
+            <a:pPr marL="228594" indent="-169329">
+              <a:buClr>
+                <a:schemeClr val="dk2"/>
+              </a:buClr>
+              <a:buSzPts val="1100"/>
+              <a:buFont typeface="Calibri"/>
+              <a:buChar char="●"/>
+            </a:pPr>
+            <a:r>
+              <a:rPr lang="en" sz="1467">
+                <a:solidFill>
+                  <a:schemeClr val="dk2"/>
+                </a:solidFill>
+                <a:latin typeface="Calibri"/>
+                <a:ea typeface="Calibri"/>
+                <a:cs typeface="Calibri"/>
+                <a:sym typeface="Calibri"/>
+              </a:rPr>
+              <a:t>STA-BIL Starting Fluid (spray can)</a:t>
+            </a:r>
+            <a:endParaRPr sz="1467">
+              <a:solidFill>
+                <a:schemeClr val="dk2"/>
+              </a:solidFill>
+              <a:latin typeface="Calibri"/>
+              <a:ea typeface="Calibri"/>
+              <a:cs typeface="Calibri"/>
+              <a:sym typeface="Calibri"/>
+            </a:endParaRPr>
+          </a:p>
+          <a:p>
+            <a:pPr marL="228594" indent="-169329">
+              <a:buClr>
+                <a:schemeClr val="dk2"/>
+              </a:buClr>
+              <a:buSzPts val="1100"/>
+              <a:buFont typeface="Calibri"/>
+              <a:buChar char="●"/>
+            </a:pPr>
+            <a:r>
+              <a:rPr lang="en" sz="1467">
+                <a:solidFill>
+                  <a:schemeClr val="dk2"/>
+                </a:solidFill>
+                <a:latin typeface="Calibri"/>
+                <a:ea typeface="Calibri"/>
+                <a:cs typeface="Calibri"/>
+                <a:sym typeface="Calibri"/>
+              </a:rPr>
+              <a:t>Ethanol Shield Fuel Stabilizer</a:t>
+            </a:r>
+            <a:endParaRPr sz="1467">
+              <a:solidFill>
+                <a:schemeClr val="dk2"/>
+              </a:solidFill>
+              <a:latin typeface="Calibri"/>
+              <a:ea typeface="Calibri"/>
+              <a:cs typeface="Calibri"/>
+              <a:sym typeface="Calibri"/>
+            </a:endParaRPr>
+          </a:p>
+        </p:txBody>
+      </p:sp>
+      <p:sp>
+        <p:nvSpPr>
+          <p:cNvPr id="59" name="Google Shape;59;p13"/>
+          <p:cNvSpPr txBox="1"/>
+          <p:nvPr/>
+        </p:nvSpPr>
+        <p:spPr>
+          <a:xfrm>
+            <a:off x="6891367" y="4219718"/>
+            <a:ext cx="5222400" cy="2282241"/>
+          </a:xfrm>
+          <a:prstGeom prst="rect">
+            <a:avLst/>
+          </a:prstGeom>
+          <a:solidFill>
+            <a:srgbClr val="FFF2CC"/>
+          </a:solidFill>
+          <a:ln w="9525" cap="flat" cmpd="sng">
+            <a:solidFill>
+              <a:srgbClr val="FF0000"/>
+            </a:solidFill>
+            <a:prstDash val="solid"/>
+            <a:round/>
+            <a:headEnd type="none" w="sm" len="sm"/>
+            <a:tailEnd type="none" w="sm" len="sm"/>
+          </a:ln>
+        </p:spPr>
+        <p:txBody>
+          <a:bodyPr spcFirstLastPara="1" wrap="square" lIns="12167" tIns="12167" rIns="12167" bIns="12167" anchor="t" anchorCtr="0">
+            <a:spAutoFit/>
+          </a:bodyPr>
+          <a:lstStyle/>
+          <a:p>
+            <a:pPr marL="228594" indent="-169329">
+              <a:buClr>
+                <a:srgbClr val="FF0000"/>
+              </a:buClr>
+              <a:buSzPts val="1100"/>
+              <a:buFont typeface="Calibri"/>
+              <a:buChar char="●"/>
+            </a:pPr>
+            <a:r>
+              <a:rPr lang="en" sz="1467" b="1">
+                <a:solidFill>
+                  <a:srgbClr val="FF0000"/>
+                </a:solidFill>
+                <a:latin typeface="Calibri"/>
+                <a:ea typeface="Calibri"/>
+                <a:cs typeface="Calibri"/>
+                <a:sym typeface="Calibri"/>
+              </a:rPr>
+              <a:t>How to prepare JD-425 for storage:</a:t>
+            </a:r>
+            <a:endParaRPr sz="1467" b="1">
+              <a:solidFill>
+                <a:srgbClr val="FF0000"/>
+              </a:solidFill>
+              <a:latin typeface="Calibri"/>
+              <a:ea typeface="Calibri"/>
+              <a:cs typeface="Calibri"/>
+              <a:sym typeface="Calibri"/>
+            </a:endParaRPr>
+          </a:p>
+          <a:p>
+            <a:pPr marL="228594" indent="-169329">
+              <a:buClr>
+                <a:schemeClr val="dk2"/>
+              </a:buClr>
+              <a:buSzPts val="1100"/>
+              <a:buFont typeface="Calibri"/>
+              <a:buChar char="●"/>
+            </a:pPr>
+            <a:r>
+              <a:rPr lang="en" sz="1467">
+                <a:solidFill>
+                  <a:schemeClr val="dk2"/>
+                </a:solidFill>
+                <a:latin typeface="Calibri"/>
+                <a:ea typeface="Calibri"/>
+                <a:cs typeface="Calibri"/>
+                <a:sym typeface="Calibri"/>
+              </a:rPr>
+              <a:t>Add fuel stabilizer (</a:t>
+            </a:r>
+            <a:r>
+              <a:rPr lang="en" sz="1467" b="1">
+                <a:solidFill>
+                  <a:srgbClr val="FF0000"/>
+                </a:solidFill>
+                <a:latin typeface="Calibri"/>
+                <a:ea typeface="Calibri"/>
+                <a:cs typeface="Calibri"/>
+                <a:sym typeface="Calibri"/>
+              </a:rPr>
+              <a:t>"Ethanol Shield"</a:t>
+            </a:r>
+            <a:r>
+              <a:rPr lang="en" sz="1467">
+                <a:solidFill>
+                  <a:schemeClr val="dk2"/>
+                </a:solidFill>
+                <a:latin typeface="Calibri"/>
+                <a:ea typeface="Calibri"/>
+                <a:cs typeface="Calibri"/>
+                <a:sym typeface="Calibri"/>
+              </a:rPr>
+              <a:t>, 1oz/gal) to fresh gas before late‑season use - and run 5–10 min to pull treated fuel into carb.</a:t>
+            </a:r>
+            <a:endParaRPr sz="1467">
+              <a:solidFill>
+                <a:schemeClr val="dk2"/>
+              </a:solidFill>
+              <a:latin typeface="Calibri"/>
+              <a:ea typeface="Calibri"/>
+              <a:cs typeface="Calibri"/>
+              <a:sym typeface="Calibri"/>
+            </a:endParaRPr>
+          </a:p>
+          <a:p>
+            <a:pPr marL="228594" indent="-169329">
+              <a:buClr>
+                <a:schemeClr val="dk2"/>
+              </a:buClr>
+              <a:buSzPts val="1100"/>
+              <a:buFont typeface="Calibri"/>
+              <a:buChar char="●"/>
+            </a:pPr>
+            <a:r>
+              <a:rPr lang="en" sz="1467">
+                <a:solidFill>
+                  <a:schemeClr val="dk2"/>
+                </a:solidFill>
+                <a:latin typeface="Calibri"/>
+                <a:ea typeface="Calibri"/>
+                <a:cs typeface="Calibri"/>
+                <a:sym typeface="Calibri"/>
+              </a:rPr>
+              <a:t>Store tractor with tank either full of stabilized fuel or completely empty (avoid half‑full)</a:t>
+            </a:r>
+            <a:endParaRPr sz="1467">
+              <a:solidFill>
+                <a:schemeClr val="dk2"/>
+              </a:solidFill>
+              <a:latin typeface="Calibri"/>
+              <a:ea typeface="Calibri"/>
+              <a:cs typeface="Calibri"/>
+              <a:sym typeface="Calibri"/>
+            </a:endParaRPr>
+          </a:p>
+          <a:p>
+            <a:pPr marL="228594" indent="-169329">
+              <a:buClr>
+                <a:schemeClr val="dk2"/>
+              </a:buClr>
+              <a:buSzPts val="1100"/>
+              <a:buFont typeface="Calibri"/>
+              <a:buChar char="●"/>
+            </a:pPr>
+            <a:r>
+              <a:rPr lang="en" sz="1467" b="1">
+                <a:solidFill>
+                  <a:srgbClr val="FF0000"/>
+                </a:solidFill>
+                <a:latin typeface="Calibri"/>
+                <a:ea typeface="Calibri"/>
+                <a:cs typeface="Calibri"/>
+                <a:sym typeface="Calibri"/>
+              </a:rPr>
+              <a:t>Close fuel shutoff valve (small manual valve next to the fuel filter on the right side of the engine)</a:t>
+            </a:r>
+            <a:r>
+              <a:rPr lang="en" sz="1467">
+                <a:solidFill>
+                  <a:schemeClr val="dk2"/>
+                </a:solidFill>
+                <a:latin typeface="Calibri"/>
+                <a:ea typeface="Calibri"/>
+                <a:cs typeface="Calibri"/>
+                <a:sym typeface="Calibri"/>
+              </a:rPr>
+              <a:t> - and run engine until it dies (carb runs dry)</a:t>
+            </a:r>
+            <a:endParaRPr sz="1467">
+              <a:solidFill>
+                <a:schemeClr val="dk2"/>
+              </a:solidFill>
+              <a:latin typeface="Calibri"/>
+              <a:ea typeface="Calibri"/>
+              <a:cs typeface="Calibri"/>
+              <a:sym typeface="Calibri"/>
+            </a:endParaRPr>
+          </a:p>
+          <a:p>
+            <a:pPr marL="228594" indent="-169329">
+              <a:buClr>
+                <a:schemeClr val="dk2"/>
+              </a:buClr>
+              <a:buSzPts val="1100"/>
+              <a:buFont typeface="Calibri"/>
+              <a:buChar char="●"/>
+            </a:pPr>
+            <a:r>
+              <a:rPr lang="en" sz="1467">
+                <a:solidFill>
+                  <a:schemeClr val="dk2"/>
+                </a:solidFill>
+                <a:latin typeface="Calibri"/>
+                <a:ea typeface="Calibri"/>
+                <a:cs typeface="Calibri"/>
+                <a:sym typeface="Calibri"/>
+              </a:rPr>
+              <a:t>At spring startup, use fresh fuel again and crack the bowl drain or tap carb to ensure free float/needle.</a:t>
+            </a:r>
+            <a:endParaRPr sz="1467">
+              <a:solidFill>
+                <a:schemeClr val="dk2"/>
+              </a:solidFill>
+              <a:latin typeface="Calibri"/>
+              <a:ea typeface="Calibri"/>
+              <a:cs typeface="Calibri"/>
+              <a:sym typeface="Calibri"/>
+            </a:endParaRPr>
+          </a:p>
+        </p:txBody>
+      </p:sp>
+      <p:pic>
+        <p:nvPicPr>
+          <p:cNvPr id="60" name="Google Shape;60;p13"/>
+          <p:cNvPicPr preferRelativeResize="0"/>
+          <p:nvPr/>
+        </p:nvPicPr>
+        <p:blipFill>
+          <a:blip r:embed="rId5" cstate="email">
+            <a:alphaModFix/>
+            <a:extLst>
+              <a:ext uri="{28A0092B-C50C-407E-A947-70E740481C1C}">
+                <a14:useLocalDpi xmlns:a14="http://schemas.microsoft.com/office/drawing/2010/main"/>
+              </a:ext>
+            </a:extLst>
+          </a:blip>
+          <a:stretch>
+            <a:fillRect/>
+          </a:stretch>
+        </p:blipFill>
+        <p:spPr>
+          <a:xfrm>
+            <a:off x="83667" y="4830733"/>
+            <a:ext cx="2570755" cy="1928067"/>
+          </a:xfrm>
+          <a:prstGeom prst="rect">
+            <a:avLst/>
+          </a:prstGeom>
+          <a:noFill/>
+          <a:ln w="9525" cap="flat" cmpd="sng">
+            <a:solidFill>
+              <a:srgbClr val="FF0000"/>
+            </a:solidFill>
+            <a:prstDash val="solid"/>
+            <a:round/>
+            <a:headEnd type="none" w="sm" len="sm"/>
+            <a:tailEnd type="none" w="sm" len="sm"/>
+          </a:ln>
+        </p:spPr>
+      </p:pic>
+      <p:pic>
+        <p:nvPicPr>
+          <p:cNvPr id="61" name="Google Shape;61;p13"/>
+          <p:cNvPicPr preferRelativeResize="0"/>
+          <p:nvPr/>
+        </p:nvPicPr>
+        <p:blipFill>
+          <a:blip r:embed="rId6" cstate="email">
+            <a:alphaModFix/>
+            <a:extLst>
+              <a:ext uri="{28A0092B-C50C-407E-A947-70E740481C1C}">
+                <a14:useLocalDpi xmlns:a14="http://schemas.microsoft.com/office/drawing/2010/main"/>
+              </a:ext>
+            </a:extLst>
+          </a:blip>
+          <a:stretch>
+            <a:fillRect/>
+          </a:stretch>
+        </p:blipFill>
+        <p:spPr>
+          <a:xfrm>
+            <a:off x="3176434" y="4830725"/>
+            <a:ext cx="2570765" cy="1928075"/>
+          </a:xfrm>
+          <a:prstGeom prst="rect">
+            <a:avLst/>
+          </a:prstGeom>
+          <a:noFill/>
+          <a:ln w="9525" cap="flat" cmpd="sng">
+            <a:solidFill>
+              <a:srgbClr val="FF0000"/>
+            </a:solidFill>
+            <a:prstDash val="solid"/>
+            <a:round/>
+            <a:headEnd type="none" w="sm" len="sm"/>
+            <a:tailEnd type="none" w="sm" len="sm"/>
+          </a:ln>
+        </p:spPr>
+      </p:pic>
+      <p:pic>
+        <p:nvPicPr>
+          <p:cNvPr id="62" name="Google Shape;62;p13"/>
+          <p:cNvPicPr preferRelativeResize="0"/>
+          <p:nvPr/>
+        </p:nvPicPr>
+        <p:blipFill>
+          <a:blip r:embed="rId7" cstate="email">
+            <a:alphaModFix/>
+            <a:extLst>
+              <a:ext uri="{28A0092B-C50C-407E-A947-70E740481C1C}">
+                <a14:useLocalDpi xmlns:a14="http://schemas.microsoft.com/office/drawing/2010/main"/>
+              </a:ext>
+            </a:extLst>
+          </a:blip>
+          <a:stretch>
+            <a:fillRect/>
+          </a:stretch>
+        </p:blipFill>
+        <p:spPr>
+          <a:xfrm>
+            <a:off x="5656108" y="2291669"/>
+            <a:ext cx="1313585" cy="1928065"/>
+          </a:xfrm>
+          <a:prstGeom prst="rect">
+            <a:avLst/>
+          </a:prstGeom>
+          <a:noFill/>
+          <a:ln>
+            <a:noFill/>
+          </a:ln>
+        </p:spPr>
+      </p:pic>
+    </p:spTree>
+  </p:cSld>
+  <p:clrMapOvr>
+    <a:masterClrMapping/>
+  </p:clrMapOvr>
+</p:sld>
+</file>
+
+<file path=ppt/slides/slide7.xml><?xml version="1.0" encoding="utf-8"?>
+<p:sld xmlns:a="http://schemas.openxmlformats.org/drawingml/2006/main" xmlns:r="http://schemas.openxmlformats.org/officeDocument/2006/relationships" xmlns:p="http://schemas.openxmlformats.org/presentationml/2006/main">
+  <p:cSld>
+    <p:spTree>
+      <p:nvGrpSpPr>
+        <p:cNvPr id="1" name="Shape 66"/>
+        <p:cNvGrpSpPr/>
+        <p:nvPr/>
+      </p:nvGrpSpPr>
+      <p:grpSpPr>
+        <a:xfrm>
+          <a:off x="0" y="0"/>
+          <a:ext cx="0" cy="0"/>
+          <a:chOff x="0" y="0"/>
+          <a:chExt cx="0" cy="0"/>
+        </a:xfrm>
+      </p:grpSpPr>
+      <p:sp>
+        <p:nvSpPr>
+          <p:cNvPr id="67" name="Google Shape;67;p14"/>
+          <p:cNvSpPr txBox="1"/>
+          <p:nvPr/>
+        </p:nvSpPr>
+        <p:spPr>
+          <a:xfrm>
+            <a:off x="223367" y="204767"/>
+            <a:ext cx="4262400" cy="475914"/>
+          </a:xfrm>
+          <a:prstGeom prst="rect">
+            <a:avLst/>
+          </a:prstGeom>
+          <a:noFill/>
+          <a:ln>
+            <a:noFill/>
+          </a:ln>
+        </p:spPr>
+        <p:txBody>
+          <a:bodyPr spcFirstLastPara="1" wrap="square" lIns="12167" tIns="12167" rIns="12167" bIns="12167" anchor="t" anchorCtr="0">
+            <a:spAutoFit/>
+          </a:bodyPr>
+          <a:lstStyle/>
+          <a:p>
+            <a:r>
+              <a:rPr lang="en" sz="2933" b="1">
+                <a:solidFill>
+                  <a:schemeClr val="dk2"/>
+                </a:solidFill>
+                <a:latin typeface="Calibri"/>
+                <a:ea typeface="Calibri"/>
+                <a:cs typeface="Calibri"/>
+                <a:sym typeface="Calibri"/>
+              </a:rPr>
+              <a:t>Which Stabilizer to use?</a:t>
+            </a:r>
+            <a:endParaRPr sz="2933" b="1">
+              <a:solidFill>
+                <a:schemeClr val="dk2"/>
+              </a:solidFill>
+              <a:latin typeface="Calibri"/>
+              <a:ea typeface="Calibri"/>
+              <a:cs typeface="Calibri"/>
+              <a:sym typeface="Calibri"/>
+            </a:endParaRPr>
+          </a:p>
+        </p:txBody>
+      </p:sp>
+      <p:sp>
+        <p:nvSpPr>
+          <p:cNvPr id="68" name="Google Shape;68;p14"/>
+          <p:cNvSpPr txBox="1"/>
+          <p:nvPr/>
+        </p:nvSpPr>
+        <p:spPr>
+          <a:xfrm>
+            <a:off x="135367" y="4369701"/>
+            <a:ext cx="4262400" cy="2056475"/>
+          </a:xfrm>
+          <a:prstGeom prst="rect">
+            <a:avLst/>
+          </a:prstGeom>
+          <a:solidFill>
+            <a:srgbClr val="FFF2CC"/>
+          </a:solidFill>
+          <a:ln w="9525" cap="flat" cmpd="sng">
+            <a:solidFill>
+              <a:srgbClr val="FF0000"/>
+            </a:solidFill>
+            <a:prstDash val="solid"/>
+            <a:round/>
+            <a:headEnd type="none" w="sm" len="sm"/>
+            <a:tailEnd type="none" w="sm" len="sm"/>
+          </a:ln>
+        </p:spPr>
+        <p:txBody>
+          <a:bodyPr spcFirstLastPara="1" wrap="square" lIns="12167" tIns="12167" rIns="12167" bIns="12167" anchor="t" anchorCtr="0">
+            <a:spAutoFit/>
+          </a:bodyPr>
+          <a:lstStyle/>
+          <a:p>
+            <a:r>
+              <a:rPr lang="en" sz="1467" b="1">
+                <a:solidFill>
+                  <a:schemeClr val="dk2"/>
+                </a:solidFill>
+                <a:latin typeface="Calibri"/>
+                <a:ea typeface="Calibri"/>
+                <a:cs typeface="Calibri"/>
+                <a:sym typeface="Calibri"/>
+              </a:rPr>
+              <a:t>Which Stabilizer to use?</a:t>
+            </a:r>
+            <a:endParaRPr sz="1467" b="1">
+              <a:solidFill>
+                <a:schemeClr val="dk2"/>
+              </a:solidFill>
+              <a:latin typeface="Calibri"/>
+              <a:ea typeface="Calibri"/>
+              <a:cs typeface="Calibri"/>
+              <a:sym typeface="Calibri"/>
+            </a:endParaRPr>
+          </a:p>
+          <a:p>
+            <a:pPr marL="228594" indent="-169329">
+              <a:buClr>
+                <a:srgbClr val="FF0000"/>
+              </a:buClr>
+              <a:buSzPts val="1100"/>
+              <a:buFont typeface="Calibri"/>
+              <a:buChar char="●"/>
+            </a:pPr>
+            <a:r>
+              <a:rPr lang="en" sz="1467" b="1">
+                <a:solidFill>
+                  <a:srgbClr val="FF0000"/>
+                </a:solidFill>
+                <a:latin typeface="Calibri"/>
+                <a:ea typeface="Calibri"/>
+                <a:cs typeface="Calibri"/>
+                <a:sym typeface="Calibri"/>
+              </a:rPr>
+              <a:t>Ethanol Shield</a:t>
+            </a:r>
+            <a:endParaRPr sz="1467" b="1">
+              <a:solidFill>
+                <a:srgbClr val="FF0000"/>
+              </a:solidFill>
+              <a:latin typeface="Calibri"/>
+              <a:ea typeface="Calibri"/>
+              <a:cs typeface="Calibri"/>
+              <a:sym typeface="Calibri"/>
+            </a:endParaRPr>
+          </a:p>
+          <a:p>
+            <a:pPr marL="228594" indent="-169329">
+              <a:buClr>
+                <a:schemeClr val="dk2"/>
+              </a:buClr>
+              <a:buSzPts val="1100"/>
+              <a:buFont typeface="Calibri"/>
+              <a:buChar char="●"/>
+            </a:pPr>
+            <a:r>
+              <a:rPr lang="en" sz="1467" b="1">
+                <a:solidFill>
+                  <a:schemeClr val="dk2"/>
+                </a:solidFill>
+                <a:latin typeface="Calibri"/>
+                <a:ea typeface="Calibri"/>
+                <a:cs typeface="Calibri"/>
+                <a:sym typeface="Calibri"/>
+              </a:rPr>
+              <a:t>STA‑BIL </a:t>
+            </a:r>
+            <a:r>
+              <a:rPr lang="en" sz="1467">
+                <a:solidFill>
+                  <a:schemeClr val="dk2"/>
+                </a:solidFill>
+                <a:latin typeface="Calibri"/>
+                <a:ea typeface="Calibri"/>
+                <a:cs typeface="Calibri"/>
+                <a:sym typeface="Calibri"/>
+              </a:rPr>
+              <a:t>Storage Fuel Stabilizer - not recommended</a:t>
+            </a:r>
+            <a:endParaRPr sz="1467">
+              <a:solidFill>
+                <a:schemeClr val="dk2"/>
+              </a:solidFill>
+              <a:latin typeface="Calibri"/>
+              <a:ea typeface="Calibri"/>
+              <a:cs typeface="Calibri"/>
+              <a:sym typeface="Calibri"/>
+            </a:endParaRPr>
+          </a:p>
+          <a:p>
+            <a:pPr marL="228594" indent="-169329">
+              <a:buClr>
+                <a:schemeClr val="dk2"/>
+              </a:buClr>
+              <a:buSzPts val="1100"/>
+              <a:buFont typeface="Calibri"/>
+              <a:buChar char="●"/>
+            </a:pPr>
+            <a:r>
+              <a:rPr lang="en" sz="1467" b="1">
+                <a:solidFill>
+                  <a:schemeClr val="dk2"/>
+                </a:solidFill>
+                <a:latin typeface="Calibri"/>
+                <a:ea typeface="Calibri"/>
+                <a:cs typeface="Calibri"/>
+                <a:sym typeface="Calibri"/>
+              </a:rPr>
+              <a:t>Star Tron Enzyme Fuel Treatment </a:t>
+            </a:r>
+            <a:r>
+              <a:rPr lang="en" sz="1467">
+                <a:solidFill>
+                  <a:schemeClr val="dk2"/>
+                </a:solidFill>
+                <a:latin typeface="Calibri"/>
+                <a:ea typeface="Calibri"/>
+                <a:cs typeface="Calibri"/>
+                <a:sym typeface="Calibri"/>
+              </a:rPr>
+              <a:t>- very popular with ethanol pump gas; many users report cleaner carbs and fewer problems over winter</a:t>
+            </a:r>
+            <a:endParaRPr sz="1467">
+              <a:solidFill>
+                <a:schemeClr val="dk2"/>
+              </a:solidFill>
+              <a:latin typeface="Calibri"/>
+              <a:ea typeface="Calibri"/>
+              <a:cs typeface="Calibri"/>
+              <a:sym typeface="Calibri"/>
+            </a:endParaRPr>
+          </a:p>
+          <a:p>
+            <a:pPr marL="228594" indent="-169329">
+              <a:buClr>
+                <a:schemeClr val="dk2"/>
+              </a:buClr>
+              <a:buSzPts val="1100"/>
+              <a:buFont typeface="Calibri"/>
+              <a:buChar char="●"/>
+            </a:pPr>
+            <a:r>
+              <a:rPr lang="en" sz="1467" b="1">
+                <a:solidFill>
+                  <a:schemeClr val="dk2"/>
+                </a:solidFill>
+                <a:latin typeface="Calibri"/>
+                <a:ea typeface="Calibri"/>
+                <a:cs typeface="Calibri"/>
+                <a:sym typeface="Calibri"/>
+              </a:rPr>
+              <a:t>PRI‑G</a:t>
+            </a:r>
+            <a:r>
+              <a:rPr lang="en" sz="1467">
+                <a:solidFill>
+                  <a:schemeClr val="dk2"/>
+                </a:solidFill>
+                <a:latin typeface="Calibri"/>
+                <a:ea typeface="Calibri"/>
+                <a:cs typeface="Calibri"/>
+                <a:sym typeface="Calibri"/>
+              </a:rPr>
+              <a:t> – often recommended where people want multi‑year storage (Note: you need "G" for Gasoline, "D" for Diesel)</a:t>
+            </a:r>
+            <a:endParaRPr sz="1467">
+              <a:solidFill>
+                <a:schemeClr val="dk2"/>
+              </a:solidFill>
+              <a:latin typeface="Calibri"/>
+              <a:ea typeface="Calibri"/>
+              <a:cs typeface="Calibri"/>
+              <a:sym typeface="Calibri"/>
+            </a:endParaRPr>
+          </a:p>
+        </p:txBody>
+      </p:sp>
+      <p:pic>
+        <p:nvPicPr>
+          <p:cNvPr id="69" name="Google Shape;69;p14"/>
+          <p:cNvPicPr preferRelativeResize="0"/>
+          <p:nvPr/>
+        </p:nvPicPr>
+        <p:blipFill>
+          <a:blip r:embed="rId3" cstate="email">
+            <a:alphaModFix/>
+            <a:extLst>
+              <a:ext uri="{28A0092B-C50C-407E-A947-70E740481C1C}">
+                <a14:useLocalDpi xmlns:a14="http://schemas.microsoft.com/office/drawing/2010/main"/>
+              </a:ext>
+            </a:extLst>
+          </a:blip>
+          <a:stretch>
+            <a:fillRect/>
+          </a:stretch>
+        </p:blipFill>
+        <p:spPr>
+          <a:xfrm>
+            <a:off x="6889643" y="3691963"/>
+            <a:ext cx="1536207" cy="2997103"/>
+          </a:xfrm>
+          <a:prstGeom prst="rect">
+            <a:avLst/>
+          </a:prstGeom>
+          <a:noFill/>
+          <a:ln>
+            <a:noFill/>
+          </a:ln>
+        </p:spPr>
+      </p:pic>
+      <p:pic>
+        <p:nvPicPr>
+          <p:cNvPr id="70" name="Google Shape;70;p14"/>
+          <p:cNvPicPr preferRelativeResize="0"/>
+          <p:nvPr/>
+        </p:nvPicPr>
+        <p:blipFill>
+          <a:blip r:embed="rId4" cstate="email">
+            <a:alphaModFix/>
+            <a:extLst>
+              <a:ext uri="{28A0092B-C50C-407E-A947-70E740481C1C}">
+                <a14:useLocalDpi xmlns:a14="http://schemas.microsoft.com/office/drawing/2010/main"/>
+              </a:ext>
+            </a:extLst>
+          </a:blip>
+          <a:stretch>
+            <a:fillRect/>
+          </a:stretch>
+        </p:blipFill>
+        <p:spPr>
+          <a:xfrm>
+            <a:off x="8566329" y="3429000"/>
+            <a:ext cx="1467032" cy="3260067"/>
+          </a:xfrm>
+          <a:prstGeom prst="rect">
+            <a:avLst/>
+          </a:prstGeom>
+          <a:noFill/>
+          <a:ln>
+            <a:noFill/>
+          </a:ln>
+        </p:spPr>
+      </p:pic>
+      <p:pic>
+        <p:nvPicPr>
+          <p:cNvPr id="71" name="Google Shape;71;p14"/>
+          <p:cNvPicPr preferRelativeResize="0"/>
+          <p:nvPr/>
+        </p:nvPicPr>
+        <p:blipFill>
+          <a:blip r:embed="rId5" cstate="email">
+            <a:alphaModFix/>
+            <a:extLst>
+              <a:ext uri="{28A0092B-C50C-407E-A947-70E740481C1C}">
+                <a14:useLocalDpi xmlns:a14="http://schemas.microsoft.com/office/drawing/2010/main"/>
+              </a:ext>
+            </a:extLst>
+          </a:blip>
+          <a:stretch>
+            <a:fillRect/>
+          </a:stretch>
+        </p:blipFill>
+        <p:spPr>
+          <a:xfrm>
+            <a:off x="10173842" y="3705526"/>
+            <a:ext cx="1902959" cy="2969975"/>
+          </a:xfrm>
+          <a:prstGeom prst="rect">
+            <a:avLst/>
+          </a:prstGeom>
+          <a:noFill/>
+          <a:ln>
+            <a:noFill/>
+          </a:ln>
+        </p:spPr>
+      </p:pic>
+      <p:sp>
+        <p:nvSpPr>
+          <p:cNvPr id="72" name="Google Shape;72;p14"/>
+          <p:cNvSpPr txBox="1"/>
+          <p:nvPr/>
+        </p:nvSpPr>
+        <p:spPr>
+          <a:xfrm>
+            <a:off x="135367" y="764701"/>
+            <a:ext cx="4438400" cy="3411076"/>
+          </a:xfrm>
+          <a:prstGeom prst="rect">
+            <a:avLst/>
+          </a:prstGeom>
+          <a:solidFill>
+            <a:srgbClr val="FFF2CC"/>
+          </a:solidFill>
+          <a:ln w="9525" cap="flat" cmpd="sng">
+            <a:solidFill>
+              <a:srgbClr val="FF0000"/>
+            </a:solidFill>
+            <a:prstDash val="solid"/>
+            <a:round/>
+            <a:headEnd type="none" w="sm" len="sm"/>
+            <a:tailEnd type="none" w="sm" len="sm"/>
+          </a:ln>
+        </p:spPr>
+        <p:txBody>
+          <a:bodyPr spcFirstLastPara="1" wrap="square" lIns="12167" tIns="12167" rIns="12167" bIns="12167" anchor="t" anchorCtr="0">
+            <a:spAutoFit/>
+          </a:bodyPr>
+          <a:lstStyle/>
+          <a:p>
+            <a:pPr marL="228594" indent="-169329">
+              <a:buClr>
+                <a:schemeClr val="dk2"/>
+              </a:buClr>
+              <a:buSzPts val="1100"/>
+              <a:buFont typeface="Calibri"/>
+              <a:buChar char="●"/>
+            </a:pPr>
+            <a:r>
+              <a:rPr lang="en" sz="1467" b="1">
+                <a:solidFill>
+                  <a:srgbClr val="FF0000"/>
+                </a:solidFill>
+                <a:latin typeface="Calibri"/>
+                <a:ea typeface="Calibri"/>
+                <a:cs typeface="Calibri"/>
+                <a:sym typeface="Calibri"/>
+              </a:rPr>
+              <a:t>Chickanic YouTube Channel </a:t>
+            </a:r>
+            <a:r>
+              <a:rPr lang="en" sz="1467" b="1">
+                <a:solidFill>
+                  <a:schemeClr val="dk2"/>
+                </a:solidFill>
+                <a:latin typeface="Calibri"/>
+                <a:ea typeface="Calibri"/>
+                <a:cs typeface="Calibri"/>
+                <a:sym typeface="Calibri"/>
+              </a:rPr>
+              <a:t>consistently recommends </a:t>
+            </a:r>
+            <a:r>
+              <a:rPr lang="en" sz="1467" b="1">
+                <a:solidFill>
+                  <a:srgbClr val="FF0000"/>
+                </a:solidFill>
+                <a:latin typeface="Calibri"/>
+                <a:ea typeface="Calibri"/>
+                <a:cs typeface="Calibri"/>
+                <a:sym typeface="Calibri"/>
+              </a:rPr>
+              <a:t>Ethanol Shield</a:t>
+            </a:r>
+            <a:r>
+              <a:rPr lang="en" sz="1467" b="1">
+                <a:solidFill>
+                  <a:schemeClr val="dk2"/>
+                </a:solidFill>
+                <a:latin typeface="Calibri"/>
+                <a:ea typeface="Calibri"/>
+                <a:cs typeface="Calibri"/>
+                <a:sym typeface="Calibri"/>
+              </a:rPr>
+              <a:t> for stabilizing fuel in small engine equipment.</a:t>
+            </a:r>
+            <a:endParaRPr sz="1467" b="1">
+              <a:solidFill>
+                <a:schemeClr val="dk2"/>
+              </a:solidFill>
+              <a:latin typeface="Calibri"/>
+              <a:ea typeface="Calibri"/>
+              <a:cs typeface="Calibri"/>
+              <a:sym typeface="Calibri"/>
+            </a:endParaRPr>
+          </a:p>
+          <a:p>
+            <a:pPr marL="228594" indent="-169329">
+              <a:buClr>
+                <a:schemeClr val="dk2"/>
+              </a:buClr>
+              <a:buSzPts val="1100"/>
+              <a:buFont typeface="Calibri"/>
+              <a:buChar char="●"/>
+            </a:pPr>
+            <a:r>
+              <a:rPr lang="en" sz="1467" b="1">
+                <a:solidFill>
+                  <a:schemeClr val="dk2"/>
+                </a:solidFill>
+                <a:latin typeface="Calibri"/>
+                <a:ea typeface="Calibri"/>
+                <a:cs typeface="Calibri"/>
+                <a:sym typeface="Calibri"/>
+              </a:rPr>
+              <a:t>It effectively combines with water to help it pass through the carburetor and be burned off in the engine. Additionally, it contains oils that help rejuvenate rubber components like fuel lines, grommets, and carburetor diaphragms.</a:t>
+            </a:r>
+            <a:endParaRPr sz="1467" b="1">
+              <a:solidFill>
+                <a:schemeClr val="dk2"/>
+              </a:solidFill>
+              <a:latin typeface="Calibri"/>
+              <a:ea typeface="Calibri"/>
+              <a:cs typeface="Calibri"/>
+              <a:sym typeface="Calibri"/>
+            </a:endParaRPr>
+          </a:p>
+          <a:p>
+            <a:pPr marL="228594" indent="-169329">
+              <a:buClr>
+                <a:schemeClr val="dk2"/>
+              </a:buClr>
+              <a:buSzPts val="1100"/>
+              <a:buFont typeface="Calibri"/>
+              <a:buChar char="●"/>
+            </a:pPr>
+            <a:r>
+              <a:rPr lang="en" sz="1467" b="1">
+                <a:solidFill>
+                  <a:schemeClr val="dk2"/>
+                </a:solidFill>
+                <a:latin typeface="Calibri"/>
+                <a:ea typeface="Calibri"/>
+                <a:cs typeface="Calibri"/>
+                <a:sym typeface="Calibri"/>
+              </a:rPr>
+              <a:t>Mix 1 ounce of Ethanol Shield per gallon of fuel for storage</a:t>
+            </a:r>
+            <a:endParaRPr sz="1467" b="1">
+              <a:solidFill>
+                <a:schemeClr val="dk2"/>
+              </a:solidFill>
+              <a:latin typeface="Calibri"/>
+              <a:ea typeface="Calibri"/>
+              <a:cs typeface="Calibri"/>
+              <a:sym typeface="Calibri"/>
+            </a:endParaRPr>
+          </a:p>
+          <a:p>
+            <a:pPr marL="228594" indent="-169329">
+              <a:buClr>
+                <a:schemeClr val="dk2"/>
+              </a:buClr>
+              <a:buSzPts val="1100"/>
+              <a:buFont typeface="Calibri"/>
+              <a:buChar char="●"/>
+            </a:pPr>
+            <a:r>
+              <a:rPr lang="en" sz="1467" b="1">
+                <a:solidFill>
+                  <a:schemeClr val="dk2"/>
+                </a:solidFill>
+                <a:latin typeface="Calibri"/>
+                <a:ea typeface="Calibri"/>
+                <a:cs typeface="Calibri"/>
+                <a:sym typeface="Calibri"/>
+              </a:rPr>
+              <a:t>Minimize Air Exposure - because air and the resulting condensation is the primary cause of water in fuel, so fill the tank full</a:t>
+            </a:r>
+            <a:endParaRPr sz="1467" b="1">
+              <a:solidFill>
+                <a:schemeClr val="dk2"/>
+              </a:solidFill>
+              <a:latin typeface="Calibri"/>
+              <a:ea typeface="Calibri"/>
+              <a:cs typeface="Calibri"/>
+              <a:sym typeface="Calibri"/>
+            </a:endParaRPr>
+          </a:p>
+          <a:p>
+            <a:pPr marL="228594" indent="-169329">
+              <a:buClr>
+                <a:schemeClr val="dk2"/>
+              </a:buClr>
+              <a:buSzPts val="1100"/>
+              <a:buFont typeface="Calibri"/>
+              <a:buChar char="●"/>
+            </a:pPr>
+            <a:r>
+              <a:rPr lang="en" sz="1467" b="1" u="sng">
+                <a:solidFill>
+                  <a:schemeClr val="hlink"/>
+                </a:solidFill>
+                <a:latin typeface="Calibri"/>
+                <a:ea typeface="Calibri"/>
+                <a:cs typeface="Calibri"/>
+                <a:sym typeface="Calibri"/>
+                <a:hlinkClick r:id="rId6"/>
+              </a:rPr>
+              <a:t>http://www.youtube.com/watch?v=mRGRWwPC3lA</a:t>
+            </a:r>
+            <a:endParaRPr sz="1467" b="1">
+              <a:solidFill>
+                <a:schemeClr val="dk2"/>
+              </a:solidFill>
+              <a:latin typeface="Calibri"/>
+              <a:ea typeface="Calibri"/>
+              <a:cs typeface="Calibri"/>
+              <a:sym typeface="Calibri"/>
+            </a:endParaRPr>
+          </a:p>
+          <a:p>
+            <a:pPr marL="228594" indent="-169329">
+              <a:buClr>
+                <a:schemeClr val="dk2"/>
+              </a:buClr>
+              <a:buSzPts val="1100"/>
+              <a:buFont typeface="Calibri"/>
+              <a:buChar char="●"/>
+            </a:pPr>
+            <a:r>
+              <a:rPr lang="en" sz="1467" b="1">
+                <a:solidFill>
+                  <a:schemeClr val="dk2"/>
+                </a:solidFill>
+                <a:latin typeface="Calibri"/>
+                <a:ea typeface="Calibri"/>
+                <a:cs typeface="Calibri"/>
+                <a:sym typeface="Calibri"/>
+              </a:rPr>
+              <a:t>She explicitly advises against STA-BIL </a:t>
+            </a:r>
+            <a:endParaRPr sz="1467" b="1">
+              <a:solidFill>
+                <a:schemeClr val="dk2"/>
+              </a:solidFill>
+              <a:latin typeface="Calibri"/>
+              <a:ea typeface="Calibri"/>
+              <a:cs typeface="Calibri"/>
+              <a:sym typeface="Calibri"/>
+            </a:endParaRPr>
+          </a:p>
+        </p:txBody>
+      </p:sp>
+      <p:pic>
+        <p:nvPicPr>
+          <p:cNvPr id="73" name="Google Shape;73;p14"/>
+          <p:cNvPicPr preferRelativeResize="0"/>
+          <p:nvPr/>
+        </p:nvPicPr>
+        <p:blipFill rotWithShape="1">
+          <a:blip r:embed="rId7" cstate="email">
+            <a:alphaModFix/>
+            <a:extLst>
+              <a:ext uri="{28A0092B-C50C-407E-A947-70E740481C1C}">
+                <a14:useLocalDpi xmlns:a14="http://schemas.microsoft.com/office/drawing/2010/main"/>
+              </a:ext>
+            </a:extLst>
+          </a:blip>
+          <a:srcRect/>
+          <a:stretch/>
+        </p:blipFill>
+        <p:spPr>
+          <a:xfrm>
+            <a:off x="4772236" y="827318"/>
+            <a:ext cx="1168033" cy="3285567"/>
+          </a:xfrm>
+          <a:prstGeom prst="rect">
+            <a:avLst/>
+          </a:prstGeom>
+          <a:noFill/>
+          <a:ln>
+            <a:noFill/>
+          </a:ln>
+        </p:spPr>
+      </p:pic>
+      <p:cxnSp>
+        <p:nvCxnSpPr>
+          <p:cNvPr id="74" name="Google Shape;74;p14"/>
+          <p:cNvCxnSpPr/>
+          <p:nvPr/>
+        </p:nvCxnSpPr>
+        <p:spPr>
+          <a:xfrm>
+            <a:off x="6574333" y="3554133"/>
+            <a:ext cx="1902400" cy="2886800"/>
+          </a:xfrm>
+          <a:prstGeom prst="straightConnector1">
+            <a:avLst/>
+          </a:prstGeom>
+          <a:noFill/>
+          <a:ln w="19050" cap="flat" cmpd="sng">
+            <a:solidFill>
+              <a:srgbClr val="FF0000"/>
+            </a:solidFill>
+            <a:prstDash val="solid"/>
+            <a:round/>
+            <a:headEnd type="none" w="med" len="med"/>
+            <a:tailEnd type="none" w="med" len="med"/>
+          </a:ln>
+        </p:spPr>
+      </p:cxnSp>
+      <p:cxnSp>
+        <p:nvCxnSpPr>
+          <p:cNvPr id="75" name="Google Shape;75;p14"/>
+          <p:cNvCxnSpPr/>
+          <p:nvPr/>
+        </p:nvCxnSpPr>
+        <p:spPr>
+          <a:xfrm flipH="1">
+            <a:off x="6972133" y="3555733"/>
+            <a:ext cx="1371200" cy="2883600"/>
+          </a:xfrm>
+          <a:prstGeom prst="straightConnector1">
+            <a:avLst/>
+          </a:prstGeom>
+          <a:noFill/>
+          <a:ln w="19050" cap="flat" cmpd="sng">
+            <a:solidFill>
+              <a:srgbClr val="FF0000"/>
+            </a:solidFill>
+            <a:prstDash val="solid"/>
+            <a:round/>
+            <a:headEnd type="none" w="med" len="med"/>
+            <a:tailEnd type="none" w="med" len="med"/>
+          </a:ln>
+        </p:spPr>
+      </p:cxnSp>
+    </p:spTree>
+  </p:cSld>
+  <p:clrMapOvr>
+    <a:masterClrMapping/>
+  </p:clrMapOvr>
+</p:sld>
+</file>
+
+<file path=ppt/slides/slide8.xml><?xml version="1.0" encoding="utf-8"?>
+<p:sld xmlns:a="http://schemas.openxmlformats.org/drawingml/2006/main" xmlns:r="http://schemas.openxmlformats.org/officeDocument/2006/relationships" xmlns:p="http://schemas.openxmlformats.org/presentationml/2006/main">
+  <p:cSld>
+    <p:spTree>
+      <p:nvGrpSpPr>
+        <p:cNvPr id="1" name="Shape 79"/>
+        <p:cNvGrpSpPr/>
+        <p:nvPr/>
+      </p:nvGrpSpPr>
+      <p:grpSpPr>
+        <a:xfrm>
+          <a:off x="0" y="0"/>
+          <a:ext cx="0" cy="0"/>
+          <a:chOff x="0" y="0"/>
+          <a:chExt cx="0" cy="0"/>
+        </a:xfrm>
+      </p:grpSpPr>
+      <p:sp>
+        <p:nvSpPr>
+          <p:cNvPr id="80" name="Google Shape;80;p15"/>
+          <p:cNvSpPr txBox="1"/>
+          <p:nvPr/>
+        </p:nvSpPr>
+        <p:spPr>
+          <a:xfrm>
+            <a:off x="223367" y="204767"/>
+            <a:ext cx="4262400" cy="475914"/>
+          </a:xfrm>
+          <a:prstGeom prst="rect">
+            <a:avLst/>
+          </a:prstGeom>
+          <a:noFill/>
+          <a:ln>
+            <a:noFill/>
+          </a:ln>
+        </p:spPr>
+        <p:txBody>
+          <a:bodyPr spcFirstLastPara="1" wrap="square" lIns="12167" tIns="12167" rIns="12167" bIns="12167" anchor="t" anchorCtr="0">
+            <a:spAutoFit/>
+          </a:bodyPr>
+          <a:lstStyle/>
+          <a:p>
+            <a:r>
+              <a:rPr lang="en" sz="2933" b="1">
+                <a:solidFill>
+                  <a:schemeClr val="dk2"/>
+                </a:solidFill>
+                <a:latin typeface="Calibri"/>
+                <a:ea typeface="Calibri"/>
+                <a:cs typeface="Calibri"/>
+                <a:sym typeface="Calibri"/>
+              </a:rPr>
+              <a:t>JD-425 Electronic Modules</a:t>
+            </a:r>
+            <a:endParaRPr sz="2933" b="1">
+              <a:solidFill>
+                <a:schemeClr val="dk2"/>
+              </a:solidFill>
+              <a:latin typeface="Calibri"/>
+              <a:ea typeface="Calibri"/>
+              <a:cs typeface="Calibri"/>
+              <a:sym typeface="Calibri"/>
+            </a:endParaRPr>
+          </a:p>
+        </p:txBody>
+      </p:sp>
+      <p:sp>
+        <p:nvSpPr>
+          <p:cNvPr id="81" name="Google Shape;81;p15"/>
+          <p:cNvSpPr txBox="1"/>
+          <p:nvPr/>
+        </p:nvSpPr>
+        <p:spPr>
+          <a:xfrm>
+            <a:off x="135367" y="764700"/>
+            <a:ext cx="4438400" cy="701873"/>
+          </a:xfrm>
+          <a:prstGeom prst="rect">
+            <a:avLst/>
+          </a:prstGeom>
+          <a:solidFill>
+            <a:srgbClr val="FFF2CC"/>
+          </a:solidFill>
+          <a:ln w="9525" cap="flat" cmpd="sng">
+            <a:solidFill>
+              <a:srgbClr val="FF0000"/>
+            </a:solidFill>
+            <a:prstDash val="solid"/>
+            <a:round/>
+            <a:headEnd type="none" w="sm" len="sm"/>
+            <a:tailEnd type="none" w="sm" len="sm"/>
+          </a:ln>
+        </p:spPr>
+        <p:txBody>
+          <a:bodyPr spcFirstLastPara="1" wrap="square" lIns="12167" tIns="12167" rIns="12167" bIns="12167" anchor="t" anchorCtr="0">
+            <a:spAutoFit/>
+          </a:bodyPr>
+          <a:lstStyle/>
+          <a:p>
+            <a:pPr marL="228594" indent="-169329">
+              <a:buClr>
+                <a:schemeClr val="dk2"/>
+              </a:buClr>
+              <a:buSzPts val="1100"/>
+              <a:buFont typeface="Calibri"/>
+              <a:buChar char="●"/>
+            </a:pPr>
+            <a:r>
+              <a:rPr lang="en" sz="1467" b="1">
+                <a:solidFill>
+                  <a:schemeClr val="dk2"/>
+                </a:solidFill>
+                <a:latin typeface="Calibri"/>
+                <a:ea typeface="Calibri"/>
+                <a:cs typeface="Calibri"/>
+                <a:sym typeface="Calibri"/>
+              </a:rPr>
+              <a:t>Ignition time‑delay module (TDM)</a:t>
+            </a:r>
+            <a:endParaRPr sz="1467" b="1">
+              <a:solidFill>
+                <a:schemeClr val="dk2"/>
+              </a:solidFill>
+              <a:latin typeface="Calibri"/>
+              <a:ea typeface="Calibri"/>
+              <a:cs typeface="Calibri"/>
+              <a:sym typeface="Calibri"/>
+            </a:endParaRPr>
+          </a:p>
+          <a:p>
+            <a:pPr marL="228594" indent="-169329">
+              <a:buClr>
+                <a:schemeClr val="dk2"/>
+              </a:buClr>
+              <a:buSzPts val="1100"/>
+              <a:buFont typeface="Calibri"/>
+              <a:buChar char="●"/>
+            </a:pPr>
+            <a:r>
+              <a:rPr lang="en" sz="1467" b="1">
+                <a:solidFill>
+                  <a:schemeClr val="dk2"/>
+                </a:solidFill>
+                <a:latin typeface="Calibri"/>
+                <a:ea typeface="Calibri"/>
+                <a:cs typeface="Calibri"/>
+                <a:sym typeface="Calibri"/>
+              </a:rPr>
+              <a:t>a.k.a. “CDI” or “time delay box.”</a:t>
+            </a:r>
+            <a:endParaRPr sz="1467" b="1">
+              <a:solidFill>
+                <a:schemeClr val="dk2"/>
+              </a:solidFill>
+              <a:latin typeface="Calibri"/>
+              <a:ea typeface="Calibri"/>
+              <a:cs typeface="Calibri"/>
+              <a:sym typeface="Calibri"/>
+            </a:endParaRPr>
+          </a:p>
+          <a:p>
+            <a:pPr marL="228594" indent="-169329">
+              <a:buClr>
+                <a:schemeClr val="dk2"/>
+              </a:buClr>
+              <a:buSzPts val="1100"/>
+              <a:buFont typeface="Calibri"/>
+              <a:buChar char="●"/>
+            </a:pPr>
+            <a:r>
+              <a:rPr lang="en" sz="1467" b="1">
+                <a:solidFill>
+                  <a:schemeClr val="dk2"/>
+                </a:solidFill>
+                <a:latin typeface="Calibri"/>
+                <a:ea typeface="Calibri"/>
+                <a:cs typeface="Calibri"/>
+                <a:sym typeface="Calibri"/>
+              </a:rPr>
+              <a:t>JD part number: AM128906 (Ignition Delay Module)</a:t>
+            </a:r>
+            <a:endParaRPr sz="1467" b="1">
+              <a:solidFill>
+                <a:schemeClr val="dk2"/>
+              </a:solidFill>
+              <a:latin typeface="Calibri"/>
+              <a:ea typeface="Calibri"/>
+              <a:cs typeface="Calibri"/>
+              <a:sym typeface="Calibri"/>
+            </a:endParaRPr>
+          </a:p>
+        </p:txBody>
+      </p:sp>
+      <p:pic>
+        <p:nvPicPr>
+          <p:cNvPr id="82" name="Google Shape;82;p15"/>
+          <p:cNvPicPr preferRelativeResize="0"/>
+          <p:nvPr/>
+        </p:nvPicPr>
+        <p:blipFill rotWithShape="1">
+          <a:blip r:embed="rId3" cstate="email">
+            <a:alphaModFix/>
+            <a:extLst>
+              <a:ext uri="{28A0092B-C50C-407E-A947-70E740481C1C}">
+                <a14:useLocalDpi xmlns:a14="http://schemas.microsoft.com/office/drawing/2010/main"/>
+              </a:ext>
+            </a:extLst>
+          </a:blip>
+          <a:srcRect/>
+          <a:stretch/>
+        </p:blipFill>
+        <p:spPr>
+          <a:xfrm>
+            <a:off x="4926900" y="680767"/>
+            <a:ext cx="2757120" cy="1011533"/>
+          </a:xfrm>
+          <a:prstGeom prst="rect">
+            <a:avLst/>
+          </a:prstGeom>
+          <a:noFill/>
+          <a:ln>
+            <a:noFill/>
+          </a:ln>
+        </p:spPr>
+      </p:pic>
+      <p:sp>
+        <p:nvSpPr>
+          <p:cNvPr id="83" name="Google Shape;83;p15"/>
+          <p:cNvSpPr txBox="1"/>
+          <p:nvPr/>
+        </p:nvSpPr>
+        <p:spPr>
+          <a:xfrm>
+            <a:off x="135367" y="2120301"/>
+            <a:ext cx="4438400" cy="1379173"/>
+          </a:xfrm>
+          <a:prstGeom prst="rect">
+            <a:avLst/>
+          </a:prstGeom>
+          <a:solidFill>
+            <a:srgbClr val="FFF2CC"/>
+          </a:solidFill>
+          <a:ln w="9525" cap="flat" cmpd="sng">
+            <a:solidFill>
+              <a:srgbClr val="FF0000"/>
+            </a:solidFill>
+            <a:prstDash val="solid"/>
+            <a:round/>
+            <a:headEnd type="none" w="sm" len="sm"/>
+            <a:tailEnd type="none" w="sm" len="sm"/>
+          </a:ln>
+        </p:spPr>
+        <p:txBody>
+          <a:bodyPr spcFirstLastPara="1" wrap="square" lIns="12167" tIns="12167" rIns="12167" bIns="12167" anchor="t" anchorCtr="0">
+            <a:spAutoFit/>
+          </a:bodyPr>
+          <a:lstStyle/>
+          <a:p>
+            <a:pPr marL="228594" indent="-169329">
+              <a:buClr>
+                <a:schemeClr val="dk2"/>
+              </a:buClr>
+              <a:buSzPts val="1100"/>
+              <a:buFont typeface="Calibri"/>
+              <a:buChar char="●"/>
+            </a:pPr>
+            <a:r>
+              <a:rPr lang="en" sz="1467" b="1">
+                <a:solidFill>
+                  <a:schemeClr val="dk2"/>
+                </a:solidFill>
+                <a:latin typeface="Calibri"/>
+                <a:ea typeface="Calibri"/>
+                <a:cs typeface="Calibri"/>
+                <a:sym typeface="Calibri"/>
+              </a:rPr>
+              <a:t>Ignitor / ignition module (engine CDI box)</a:t>
+            </a:r>
+            <a:endParaRPr sz="1467" b="1">
+              <a:solidFill>
+                <a:schemeClr val="dk2"/>
+              </a:solidFill>
+              <a:latin typeface="Calibri"/>
+              <a:ea typeface="Calibri"/>
+              <a:cs typeface="Calibri"/>
+              <a:sym typeface="Calibri"/>
+            </a:endParaRPr>
+          </a:p>
+          <a:p>
+            <a:pPr marL="228594" indent="-169329">
+              <a:buClr>
+                <a:schemeClr val="dk2"/>
+              </a:buClr>
+              <a:buSzPts val="1100"/>
+              <a:buFont typeface="Calibri"/>
+              <a:buChar char="●"/>
+            </a:pPr>
+            <a:r>
+              <a:rPr lang="en" sz="1467" b="1">
+                <a:solidFill>
+                  <a:schemeClr val="dk2"/>
+                </a:solidFill>
+                <a:latin typeface="Calibri"/>
+                <a:ea typeface="Calibri"/>
+                <a:cs typeface="Calibri"/>
+                <a:sym typeface="Calibri"/>
+              </a:rPr>
+              <a:t>Function: JD calls this “IGNITOR”; it actually drives the ignition coils based on signals from the engine (CDI/ignition module). Loss of spark on one bank when hot is a classic failure.</a:t>
+            </a:r>
+            <a:endParaRPr sz="1467" b="1">
+              <a:solidFill>
+                <a:schemeClr val="dk2"/>
+              </a:solidFill>
+              <a:latin typeface="Calibri"/>
+              <a:ea typeface="Calibri"/>
+              <a:cs typeface="Calibri"/>
+              <a:sym typeface="Calibri"/>
+            </a:endParaRPr>
+          </a:p>
+          <a:p>
+            <a:pPr marL="228594" indent="-169329">
+              <a:buClr>
+                <a:schemeClr val="dk2"/>
+              </a:buClr>
+              <a:buSzPts val="1100"/>
+              <a:buFont typeface="Calibri"/>
+              <a:buChar char="●"/>
+            </a:pPr>
+            <a:r>
+              <a:rPr lang="en" sz="1467" b="1">
+                <a:solidFill>
+                  <a:schemeClr val="dk2"/>
+                </a:solidFill>
+                <a:latin typeface="Calibri"/>
+                <a:ea typeface="Calibri"/>
+                <a:cs typeface="Calibri"/>
+                <a:sym typeface="Calibri"/>
+              </a:rPr>
+              <a:t>JD part number AM105574 ignition module</a:t>
+            </a:r>
+            <a:endParaRPr sz="1467" b="1">
+              <a:solidFill>
+                <a:schemeClr val="dk2"/>
+              </a:solidFill>
+              <a:latin typeface="Calibri"/>
+              <a:ea typeface="Calibri"/>
+              <a:cs typeface="Calibri"/>
+              <a:sym typeface="Calibri"/>
+            </a:endParaRPr>
+          </a:p>
+        </p:txBody>
+      </p:sp>
+      <p:pic>
+        <p:nvPicPr>
+          <p:cNvPr id="84" name="Google Shape;84;p15"/>
+          <p:cNvPicPr preferRelativeResize="0"/>
+          <p:nvPr/>
+        </p:nvPicPr>
+        <p:blipFill rotWithShape="1">
+          <a:blip r:embed="rId4" cstate="email">
+            <a:alphaModFix/>
+            <a:extLst>
+              <a:ext uri="{28A0092B-C50C-407E-A947-70E740481C1C}">
+                <a14:useLocalDpi xmlns:a14="http://schemas.microsoft.com/office/drawing/2010/main"/>
+              </a:ext>
+            </a:extLst>
+          </a:blip>
+          <a:srcRect/>
+          <a:stretch/>
+        </p:blipFill>
+        <p:spPr>
+          <a:xfrm>
+            <a:off x="5052917" y="2125485"/>
+            <a:ext cx="1852367" cy="1820433"/>
+          </a:xfrm>
+          <a:prstGeom prst="rect">
+            <a:avLst/>
+          </a:prstGeom>
+          <a:noFill/>
+          <a:ln>
+            <a:noFill/>
+          </a:ln>
+        </p:spPr>
+      </p:pic>
+      <p:sp>
+        <p:nvSpPr>
+          <p:cNvPr id="85" name="Google Shape;85;p15"/>
+          <p:cNvSpPr txBox="1"/>
+          <p:nvPr/>
+        </p:nvSpPr>
+        <p:spPr>
+          <a:xfrm>
+            <a:off x="135367" y="4674901"/>
+            <a:ext cx="4438400" cy="1604941"/>
+          </a:xfrm>
+          <a:prstGeom prst="rect">
+            <a:avLst/>
+          </a:prstGeom>
+          <a:solidFill>
+            <a:srgbClr val="FFF2CC"/>
+          </a:solidFill>
+          <a:ln w="9525" cap="flat" cmpd="sng">
+            <a:solidFill>
+              <a:srgbClr val="FF0000"/>
+            </a:solidFill>
+            <a:prstDash val="solid"/>
+            <a:round/>
+            <a:headEnd type="none" w="sm" len="sm"/>
+            <a:tailEnd type="none" w="sm" len="sm"/>
+          </a:ln>
+        </p:spPr>
+        <p:txBody>
+          <a:bodyPr spcFirstLastPara="1" wrap="square" lIns="12167" tIns="12167" rIns="12167" bIns="12167" anchor="t" anchorCtr="0">
+            <a:spAutoFit/>
+          </a:bodyPr>
+          <a:lstStyle/>
+          <a:p>
+            <a:pPr marL="228594" indent="-169329">
+              <a:buClr>
+                <a:schemeClr val="dk2"/>
+              </a:buClr>
+              <a:buSzPts val="1100"/>
+              <a:buFont typeface="Calibri"/>
+              <a:buChar char="●"/>
+            </a:pPr>
+            <a:r>
+              <a:rPr lang="en" sz="1467" b="1">
+                <a:solidFill>
+                  <a:schemeClr val="dk2"/>
+                </a:solidFill>
+                <a:latin typeface="Calibri"/>
+                <a:ea typeface="Calibri"/>
+                <a:cs typeface="Calibri"/>
+                <a:sym typeface="Calibri"/>
+              </a:rPr>
+              <a:t>Ignition switch module / dash control board</a:t>
+            </a:r>
+            <a:endParaRPr sz="1467" b="1">
+              <a:solidFill>
+                <a:schemeClr val="dk2"/>
+              </a:solidFill>
+              <a:latin typeface="Calibri"/>
+              <a:ea typeface="Calibri"/>
+              <a:cs typeface="Calibri"/>
+              <a:sym typeface="Calibri"/>
+            </a:endParaRPr>
+          </a:p>
+          <a:p>
+            <a:pPr marL="228594" indent="-169329">
+              <a:buClr>
+                <a:schemeClr val="dk2"/>
+              </a:buClr>
+              <a:buSzPts val="1100"/>
+              <a:buFont typeface="Calibri"/>
+              <a:buChar char="●"/>
+            </a:pPr>
+            <a:r>
+              <a:rPr lang="en" sz="1467" b="1">
+                <a:solidFill>
+                  <a:schemeClr val="dk2"/>
+                </a:solidFill>
+                <a:latin typeface="Calibri"/>
+                <a:ea typeface="Calibri"/>
+                <a:cs typeface="Calibri"/>
+                <a:sym typeface="Calibri"/>
+              </a:rPr>
+              <a:t>Circuit‑board module behind the key switch that routes power to the time‑delay module, ignitor, and other circuits</a:t>
+            </a:r>
+            <a:endParaRPr sz="1467" b="1">
+              <a:solidFill>
+                <a:schemeClr val="dk2"/>
+              </a:solidFill>
+              <a:latin typeface="Calibri"/>
+              <a:ea typeface="Calibri"/>
+              <a:cs typeface="Calibri"/>
+              <a:sym typeface="Calibri"/>
+            </a:endParaRPr>
+          </a:p>
+          <a:p>
+            <a:pPr marL="228594" indent="-169329">
+              <a:buClr>
+                <a:schemeClr val="dk2"/>
+              </a:buClr>
+              <a:buSzPts val="1100"/>
+              <a:buFont typeface="Calibri"/>
+              <a:buChar char="●"/>
+            </a:pPr>
+            <a:r>
+              <a:rPr lang="en" sz="1467" b="1">
+                <a:solidFill>
+                  <a:schemeClr val="dk2"/>
+                </a:solidFill>
+                <a:latin typeface="Calibri"/>
+                <a:ea typeface="Calibri"/>
+                <a:cs typeface="Calibri"/>
+                <a:sym typeface="Calibri"/>
+              </a:rPr>
+              <a:t>JD part number AM128878 ignition switch module,</a:t>
+            </a:r>
+            <a:endParaRPr sz="1467" b="1">
+              <a:solidFill>
+                <a:schemeClr val="dk2"/>
+              </a:solidFill>
+              <a:latin typeface="Calibri"/>
+              <a:ea typeface="Calibri"/>
+              <a:cs typeface="Calibri"/>
+              <a:sym typeface="Calibri"/>
+            </a:endParaRPr>
+          </a:p>
+          <a:p>
+            <a:pPr marL="228594" indent="-169329">
+              <a:buClr>
+                <a:schemeClr val="dk2"/>
+              </a:buClr>
+              <a:buSzPts val="1100"/>
+              <a:buFont typeface="Calibri"/>
+              <a:buChar char="●"/>
+            </a:pPr>
+            <a:r>
+              <a:rPr lang="en" sz="1467" b="1">
+                <a:solidFill>
+                  <a:schemeClr val="dk2"/>
+                </a:solidFill>
+                <a:latin typeface="Calibri"/>
+                <a:ea typeface="Calibri"/>
+                <a:cs typeface="Calibri"/>
+                <a:sym typeface="Calibri"/>
+              </a:rPr>
+              <a:t>often sold in kits and superseded/combined into kits like AM136681 (module + keys) </a:t>
+            </a:r>
+            <a:endParaRPr sz="1467" b="1">
+              <a:solidFill>
+                <a:schemeClr val="dk2"/>
+              </a:solidFill>
+              <a:latin typeface="Calibri"/>
+              <a:ea typeface="Calibri"/>
+              <a:cs typeface="Calibri"/>
+              <a:sym typeface="Calibri"/>
+            </a:endParaRPr>
+          </a:p>
+        </p:txBody>
+      </p:sp>
+      <p:pic>
+        <p:nvPicPr>
+          <p:cNvPr id="86" name="Google Shape;86;p15"/>
+          <p:cNvPicPr preferRelativeResize="0"/>
+          <p:nvPr/>
+        </p:nvPicPr>
+        <p:blipFill rotWithShape="1">
+          <a:blip r:embed="rId5" cstate="email">
+            <a:alphaModFix/>
+            <a:extLst>
+              <a:ext uri="{28A0092B-C50C-407E-A947-70E740481C1C}">
+                <a14:useLocalDpi xmlns:a14="http://schemas.microsoft.com/office/drawing/2010/main"/>
+              </a:ext>
+            </a:extLst>
+          </a:blip>
+          <a:srcRect/>
+          <a:stretch/>
+        </p:blipFill>
+        <p:spPr>
+          <a:xfrm>
+            <a:off x="5151667" y="4527000"/>
+            <a:ext cx="1888667" cy="1900600"/>
+          </a:xfrm>
+          <a:prstGeom prst="rect">
+            <a:avLst/>
+          </a:prstGeom>
+          <a:noFill/>
+          <a:ln>
+            <a:noFill/>
+          </a:ln>
+        </p:spPr>
+      </p:pic>
+    </p:spTree>
+  </p:cSld>
+  <p:clrMapOvr>
+    <a:masterClrMapping/>
+  </p:clrMapOvr>
+</p:sld>
+</file>
+
+<file path=ppt/slides/slide9.xml><?xml version="1.0" encoding="utf-8"?>
+<p:sld xmlns:a="http://schemas.openxmlformats.org/drawingml/2006/main" xmlns:r="http://schemas.openxmlformats.org/officeDocument/2006/relationships" xmlns:p="http://schemas.openxmlformats.org/presentationml/2006/main">
+  <p:cSld>
+    <p:spTree>
+      <p:nvGrpSpPr>
         <p:cNvPr id="1" name="">
           <a:extLst>
             <a:ext uri="{FF2B5EF4-FFF2-40B4-BE49-F238E27FC236}">
@@ -7925,700 +11891,6 @@
     <p:extLst>
       <p:ext uri="{BB962C8B-B14F-4D97-AF65-F5344CB8AC3E}">
         <p14:creationId xmlns:p14="http://schemas.microsoft.com/office/powerpoint/2010/main" val="2753344728"/>
-      </p:ext>
-    </p:extLst>
-  </p:cSld>
-  <p:clrMapOvr>
-    <a:masterClrMapping/>
-  </p:clrMapOvr>
-</p:sld>
-</file>
-
-<file path=ppt/slides/slide7.xml><?xml version="1.0" encoding="utf-8"?>
-<p:sld xmlns:a="http://schemas.openxmlformats.org/drawingml/2006/main" xmlns:r="http://schemas.openxmlformats.org/officeDocument/2006/relationships" xmlns:p="http://schemas.openxmlformats.org/presentationml/2006/main">
-  <p:cSld>
-    <p:spTree>
-      <p:nvGrpSpPr>
-        <p:cNvPr id="1" name="">
-          <a:extLst>
-            <a:ext uri="{FF2B5EF4-FFF2-40B4-BE49-F238E27FC236}">
-              <a16:creationId xmlns:a16="http://schemas.microsoft.com/office/drawing/2014/main" id="{C69DFF58-FBBF-53F0-A28B-B37995B4784E}"/>
-            </a:ext>
-          </a:extLst>
-        </p:cNvPr>
-        <p:cNvGrpSpPr/>
-        <p:nvPr/>
-      </p:nvGrpSpPr>
-      <p:grpSpPr>
-        <a:xfrm>
-          <a:off x="0" y="0"/>
-          <a:ext cx="0" cy="0"/>
-          <a:chOff x="0" y="0"/>
-          <a:chExt cx="0" cy="0"/>
-        </a:xfrm>
-      </p:grpSpPr>
-      <p:sp>
-        <p:nvSpPr>
-          <p:cNvPr id="2" name="TextBox 1">
-            <a:extLst>
-              <a:ext uri="{FF2B5EF4-FFF2-40B4-BE49-F238E27FC236}">
-                <a16:creationId xmlns:a16="http://schemas.microsoft.com/office/drawing/2014/main" id="{2EB671DF-9B83-58E4-1589-582DFF8EC478}"/>
-              </a:ext>
-            </a:extLst>
-          </p:cNvPr>
-          <p:cNvSpPr txBox="1"/>
-          <p:nvPr/>
-        </p:nvSpPr>
-        <p:spPr>
-          <a:xfrm>
-            <a:off x="168166" y="111093"/>
-            <a:ext cx="4117119" cy="523220"/>
-          </a:xfrm>
-          <a:prstGeom prst="rect">
-            <a:avLst/>
-          </a:prstGeom>
-          <a:noFill/>
-        </p:spPr>
-        <p:txBody>
-          <a:bodyPr wrap="square" rtlCol="0">
-            <a:spAutoFit/>
-          </a:bodyPr>
-          <a:lstStyle/>
-          <a:p>
-            <a:r>
-              <a:rPr lang="en-US" sz="2800" b="1" dirty="0"/>
-              <a:t>Modern JD Loan Tractors</a:t>
-            </a:r>
-          </a:p>
-        </p:txBody>
-      </p:sp>
-      <p:sp>
-        <p:nvSpPr>
-          <p:cNvPr id="31" name="TextBox 30">
-            <a:extLst>
-              <a:ext uri="{FF2B5EF4-FFF2-40B4-BE49-F238E27FC236}">
-                <a16:creationId xmlns:a16="http://schemas.microsoft.com/office/drawing/2014/main" id="{2BA9A503-459B-12FC-6EA2-5A8EA16297E2}"/>
-              </a:ext>
-            </a:extLst>
-          </p:cNvPr>
-          <p:cNvSpPr txBox="1"/>
-          <p:nvPr/>
-        </p:nvSpPr>
-        <p:spPr>
-          <a:xfrm>
-            <a:off x="241741" y="634313"/>
-            <a:ext cx="3741680" cy="276999"/>
-          </a:xfrm>
-          <a:prstGeom prst="rect">
-            <a:avLst/>
-          </a:prstGeom>
-          <a:noFill/>
-        </p:spPr>
-        <p:txBody>
-          <a:bodyPr wrap="square" rtlCol="0">
-            <a:spAutoFit/>
-          </a:bodyPr>
-          <a:lstStyle/>
-          <a:p>
-            <a:pPr algn="ctr"/>
-            <a:r>
-              <a:rPr lang="en-US" sz="1200" dirty="0">
-                <a:hlinkClick r:id="rId2"/>
-              </a:rPr>
-              <a:t>https://</a:t>
-            </a:r>
-            <a:r>
-              <a:rPr lang="en-US" sz="1200" dirty="0" err="1">
-                <a:hlinkClick r:id="rId2"/>
-              </a:rPr>
-              <a:t>www.deere.com</a:t>
-            </a:r>
-            <a:r>
-              <a:rPr lang="en-US" sz="1200" dirty="0">
-                <a:hlinkClick r:id="rId2"/>
-              </a:rPr>
-              <a:t>/</a:t>
-            </a:r>
-            <a:r>
-              <a:rPr lang="en-US" sz="1200" dirty="0" err="1">
-                <a:hlinkClick r:id="rId2"/>
-              </a:rPr>
-              <a:t>en</a:t>
-            </a:r>
-            <a:r>
-              <a:rPr lang="en-US" sz="1200" dirty="0">
-                <a:hlinkClick r:id="rId2"/>
-              </a:rPr>
-              <a:t>/mowers/lawn-tractors/</a:t>
-            </a:r>
-            <a:endParaRPr lang="en-US" sz="1200" dirty="0"/>
-          </a:p>
-        </p:txBody>
-      </p:sp>
-      <p:pic>
-        <p:nvPicPr>
-          <p:cNvPr id="1026" name="Picture 2" descr="studio image of the S100 Series lawn mower">
-            <a:extLst>
-              <a:ext uri="{FF2B5EF4-FFF2-40B4-BE49-F238E27FC236}">
-                <a16:creationId xmlns:a16="http://schemas.microsoft.com/office/drawing/2014/main" id="{A4E09826-02EB-A97D-A609-B18C5511BF4C}"/>
-              </a:ext>
-            </a:extLst>
-          </p:cNvPr>
-          <p:cNvPicPr>
-            <a:picLocks noChangeAspect="1" noChangeArrowheads="1"/>
-          </p:cNvPicPr>
-          <p:nvPr/>
-        </p:nvPicPr>
-        <p:blipFill rotWithShape="1">
-          <a:blip r:embed="rId3" cstate="email">
-            <a:extLst>
-              <a:ext uri="{28A0092B-C50C-407E-A947-70E740481C1C}">
-                <a14:useLocalDpi xmlns:a14="http://schemas.microsoft.com/office/drawing/2010/main"/>
-              </a:ext>
-            </a:extLst>
-          </a:blip>
-          <a:srcRect/>
-          <a:stretch/>
-        </p:blipFill>
-        <p:spPr bwMode="auto">
-          <a:xfrm>
-            <a:off x="2037732" y="1444030"/>
-            <a:ext cx="1407217" cy="1152977"/>
-          </a:xfrm>
-          <a:prstGeom prst="rect">
-            <a:avLst/>
-          </a:prstGeom>
-          <a:noFill/>
-          <a:extLst>
-            <a:ext uri="{909E8E84-426E-40DD-AFC4-6F175D3DCCD1}">
-              <a14:hiddenFill xmlns:a14="http://schemas.microsoft.com/office/drawing/2010/main">
-                <a:solidFill>
-                  <a:srgbClr val="FFFFFF"/>
-                </a:solidFill>
-              </a14:hiddenFill>
-            </a:ext>
-          </a:extLst>
-        </p:spPr>
-      </p:pic>
-      <p:sp>
-        <p:nvSpPr>
-          <p:cNvPr id="7" name="TextBox 6">
-            <a:extLst>
-              <a:ext uri="{FF2B5EF4-FFF2-40B4-BE49-F238E27FC236}">
-                <a16:creationId xmlns:a16="http://schemas.microsoft.com/office/drawing/2014/main" id="{FF534CAE-D169-9E26-0F8D-601355DD9B78}"/>
-              </a:ext>
-            </a:extLst>
-          </p:cNvPr>
-          <p:cNvSpPr txBox="1"/>
-          <p:nvPr/>
-        </p:nvSpPr>
-        <p:spPr>
-          <a:xfrm>
-            <a:off x="415160" y="1713620"/>
-            <a:ext cx="1329558" cy="646331"/>
-          </a:xfrm>
-          <a:prstGeom prst="rect">
-            <a:avLst/>
-          </a:prstGeom>
-          <a:noFill/>
-        </p:spPr>
-        <p:txBody>
-          <a:bodyPr wrap="square" rtlCol="0">
-            <a:spAutoFit/>
-          </a:bodyPr>
-          <a:lstStyle/>
-          <a:p>
-            <a:r>
-              <a:rPr lang="en-US" sz="1200" b="1" dirty="0"/>
-              <a:t>Series S100</a:t>
-            </a:r>
-          </a:p>
-          <a:p>
-            <a:r>
-              <a:rPr lang="en-US" sz="1200" b="1" dirty="0"/>
-              <a:t>42,48,54" wide</a:t>
-            </a:r>
-            <a:endParaRPr lang="en-US" sz="1200" b="1" dirty="0">
-              <a:solidFill>
-                <a:srgbClr val="FF0000"/>
-              </a:solidFill>
-            </a:endParaRPr>
-          </a:p>
-          <a:p>
-            <a:r>
-              <a:rPr lang="en-US" sz="1200" b="1" dirty="0">
-                <a:solidFill>
-                  <a:srgbClr val="FF0000"/>
-                </a:solidFill>
-              </a:rPr>
-              <a:t>$2.4 - $3.6K</a:t>
-            </a:r>
-          </a:p>
-        </p:txBody>
-      </p:sp>
-      <p:sp>
-        <p:nvSpPr>
-          <p:cNvPr id="9" name="TextBox 8">
-            <a:extLst>
-              <a:ext uri="{FF2B5EF4-FFF2-40B4-BE49-F238E27FC236}">
-                <a16:creationId xmlns:a16="http://schemas.microsoft.com/office/drawing/2014/main" id="{42C34B3C-8F87-D0A7-0EE5-06FBF377BD4D}"/>
-              </a:ext>
-            </a:extLst>
-          </p:cNvPr>
-          <p:cNvSpPr txBox="1"/>
-          <p:nvPr/>
-        </p:nvSpPr>
-        <p:spPr>
-          <a:xfrm>
-            <a:off x="415160" y="3333580"/>
-            <a:ext cx="1030868" cy="646331"/>
-          </a:xfrm>
-          <a:prstGeom prst="rect">
-            <a:avLst/>
-          </a:prstGeom>
-          <a:noFill/>
-        </p:spPr>
-        <p:txBody>
-          <a:bodyPr wrap="square" rtlCol="0">
-            <a:spAutoFit/>
-          </a:bodyPr>
-          <a:lstStyle/>
-          <a:p>
-            <a:r>
-              <a:rPr lang="en-US" sz="1200" b="1" dirty="0"/>
-              <a:t>Series S200</a:t>
-            </a:r>
-          </a:p>
-          <a:p>
-            <a:r>
-              <a:rPr lang="en-US" sz="1200" b="1" dirty="0"/>
-              <a:t>42,48 wide</a:t>
-            </a:r>
-            <a:endParaRPr lang="en-US" sz="1200" b="1" dirty="0">
-              <a:solidFill>
-                <a:srgbClr val="FF0000"/>
-              </a:solidFill>
-            </a:endParaRPr>
-          </a:p>
-          <a:p>
-            <a:r>
-              <a:rPr lang="en-US" sz="1200" b="1" dirty="0">
-                <a:solidFill>
-                  <a:srgbClr val="FF0000"/>
-                </a:solidFill>
-              </a:rPr>
-              <a:t>$3.3-3.7K</a:t>
-            </a:r>
-          </a:p>
-        </p:txBody>
-      </p:sp>
-      <p:sp>
-        <p:nvSpPr>
-          <p:cNvPr id="26" name="TextBox 25">
-            <a:extLst>
-              <a:ext uri="{FF2B5EF4-FFF2-40B4-BE49-F238E27FC236}">
-                <a16:creationId xmlns:a16="http://schemas.microsoft.com/office/drawing/2014/main" id="{11F18853-6F05-460E-4BFE-3121530005FE}"/>
-              </a:ext>
-            </a:extLst>
-          </p:cNvPr>
-          <p:cNvSpPr txBox="1"/>
-          <p:nvPr/>
-        </p:nvSpPr>
-        <p:spPr>
-          <a:xfrm>
-            <a:off x="394139" y="5100718"/>
-            <a:ext cx="1329558" cy="646331"/>
-          </a:xfrm>
-          <a:prstGeom prst="rect">
-            <a:avLst/>
-          </a:prstGeom>
-          <a:noFill/>
-        </p:spPr>
-        <p:txBody>
-          <a:bodyPr wrap="square" rtlCol="0">
-            <a:spAutoFit/>
-          </a:bodyPr>
-          <a:lstStyle/>
-          <a:p>
-            <a:r>
-              <a:rPr lang="en-US" sz="1200" b="1" dirty="0"/>
-              <a:t>Series X300</a:t>
-            </a:r>
-          </a:p>
-          <a:p>
-            <a:r>
-              <a:rPr lang="en-US" sz="1200" b="1" dirty="0"/>
-              <a:t>42,48" wide</a:t>
-            </a:r>
-            <a:endParaRPr lang="en-US" sz="1200" b="1" dirty="0">
-              <a:solidFill>
-                <a:srgbClr val="FF0000"/>
-              </a:solidFill>
-            </a:endParaRPr>
-          </a:p>
-          <a:p>
-            <a:r>
-              <a:rPr lang="en-US" sz="1200" b="1" dirty="0">
-                <a:solidFill>
-                  <a:srgbClr val="FF0000"/>
-                </a:solidFill>
-              </a:rPr>
-              <a:t>$3.6K - $7.3K</a:t>
-            </a:r>
-          </a:p>
-        </p:txBody>
-      </p:sp>
-      <p:sp>
-        <p:nvSpPr>
-          <p:cNvPr id="32" name="TextBox 31">
-            <a:extLst>
-              <a:ext uri="{FF2B5EF4-FFF2-40B4-BE49-F238E27FC236}">
-                <a16:creationId xmlns:a16="http://schemas.microsoft.com/office/drawing/2014/main" id="{10975E79-6DE1-02AC-0D61-FC672484C923}"/>
-              </a:ext>
-            </a:extLst>
-          </p:cNvPr>
-          <p:cNvSpPr txBox="1"/>
-          <p:nvPr/>
-        </p:nvSpPr>
-        <p:spPr>
-          <a:xfrm>
-            <a:off x="8525354" y="1741183"/>
-            <a:ext cx="1075846" cy="646331"/>
-          </a:xfrm>
-          <a:prstGeom prst="rect">
-            <a:avLst/>
-          </a:prstGeom>
-          <a:noFill/>
-        </p:spPr>
-        <p:txBody>
-          <a:bodyPr wrap="square" rtlCol="0">
-            <a:spAutoFit/>
-          </a:bodyPr>
-          <a:lstStyle/>
-          <a:p>
-            <a:r>
-              <a:rPr lang="en-US" sz="1200" b="1" dirty="0"/>
-              <a:t>Series X500</a:t>
-            </a:r>
-          </a:p>
-          <a:p>
-            <a:r>
-              <a:rPr lang="en-US" sz="1200" b="1" dirty="0"/>
-              <a:t>48,54" wide</a:t>
-            </a:r>
-            <a:endParaRPr lang="en-US" sz="1200" b="1" dirty="0">
-              <a:solidFill>
-                <a:srgbClr val="FF0000"/>
-              </a:solidFill>
-            </a:endParaRPr>
-          </a:p>
-          <a:p>
-            <a:r>
-              <a:rPr lang="en-US" sz="1200" b="1" dirty="0">
-                <a:solidFill>
-                  <a:srgbClr val="FF0000"/>
-                </a:solidFill>
-              </a:rPr>
-              <a:t>$7.5K - $10K</a:t>
-            </a:r>
-          </a:p>
-        </p:txBody>
-      </p:sp>
-      <p:sp>
-        <p:nvSpPr>
-          <p:cNvPr id="33" name="TextBox 32">
-            <a:extLst>
-              <a:ext uri="{FF2B5EF4-FFF2-40B4-BE49-F238E27FC236}">
-                <a16:creationId xmlns:a16="http://schemas.microsoft.com/office/drawing/2014/main" id="{9596110B-1807-2D74-947E-F0BDFACFC94E}"/>
-              </a:ext>
-            </a:extLst>
-          </p:cNvPr>
-          <p:cNvSpPr txBox="1"/>
-          <p:nvPr/>
-        </p:nvSpPr>
-        <p:spPr>
-          <a:xfrm>
-            <a:off x="8193576" y="3656745"/>
-            <a:ext cx="1739402" cy="1384995"/>
-          </a:xfrm>
-          <a:prstGeom prst="rect">
-            <a:avLst/>
-          </a:prstGeom>
-          <a:noFill/>
-        </p:spPr>
-        <p:txBody>
-          <a:bodyPr wrap="square" rtlCol="0">
-            <a:spAutoFit/>
-          </a:bodyPr>
-          <a:lstStyle/>
-          <a:p>
-            <a:pPr algn="l"/>
-            <a:r>
-              <a:rPr lang="en-US" sz="1200" b="1" i="0" dirty="0">
-                <a:effectLst/>
-                <a:latin typeface="jd_sans_probold"/>
-              </a:rPr>
-              <a:t>X700 Signature Series</a:t>
-            </a:r>
-          </a:p>
-          <a:p>
-            <a:r>
-              <a:rPr lang="en-US" sz="1200" b="1" dirty="0"/>
-              <a:t>48,54, 60" wide</a:t>
-            </a:r>
-          </a:p>
-          <a:p>
-            <a:r>
-              <a:rPr lang="en-US" sz="1200" b="1" dirty="0"/>
-              <a:t>gas or diesel</a:t>
-            </a:r>
-          </a:p>
-          <a:p>
-            <a:r>
-              <a:rPr lang="en-US" sz="1200" b="1" dirty="0"/>
-              <a:t>2 or 4-wheel drive</a:t>
-            </a:r>
-          </a:p>
-          <a:p>
-            <a:r>
-              <a:rPr lang="en-US" sz="1200" b="1" dirty="0">
-                <a:solidFill>
-                  <a:srgbClr val="FF0000"/>
-                </a:solidFill>
-              </a:rPr>
-              <a:t>$14K - $17K</a:t>
-            </a:r>
-            <a:endParaRPr lang="en-US" sz="1200" b="1" dirty="0"/>
-          </a:p>
-          <a:p>
-            <a:r>
-              <a:rPr lang="en-US" sz="1200" b="1" dirty="0"/>
-              <a:t>Best: X758, $17K </a:t>
-            </a:r>
-          </a:p>
-          <a:p>
-            <a:r>
-              <a:rPr lang="en-US" sz="1200" b="1" i="0" dirty="0">
-                <a:solidFill>
-                  <a:srgbClr val="1F1F1F"/>
-                </a:solidFill>
-                <a:effectLst/>
-                <a:latin typeface="Google Sans"/>
-              </a:rPr>
-              <a:t>weight 1,032 </a:t>
-            </a:r>
-            <a:r>
-              <a:rPr lang="en-US" sz="1200" b="1" i="0" dirty="0" err="1">
-                <a:solidFill>
-                  <a:srgbClr val="1F1F1F"/>
-                </a:solidFill>
-                <a:effectLst/>
-                <a:latin typeface="Google Sans"/>
-              </a:rPr>
-              <a:t>lbs</a:t>
-            </a:r>
-            <a:r>
-              <a:rPr lang="en-US" sz="1200" b="1" i="0" dirty="0">
-                <a:solidFill>
-                  <a:srgbClr val="1F1F1F"/>
-                </a:solidFill>
-                <a:effectLst/>
-                <a:latin typeface="Google Sans"/>
-              </a:rPr>
-              <a:t> (470kg)</a:t>
-            </a:r>
-            <a:endParaRPr lang="en-US" sz="1200" b="1" dirty="0"/>
-          </a:p>
-        </p:txBody>
-      </p:sp>
-      <p:pic>
-        <p:nvPicPr>
-          <p:cNvPr id="34" name="Picture 4" descr="studio rendering of a Z730">
-            <a:extLst>
-              <a:ext uri="{FF2B5EF4-FFF2-40B4-BE49-F238E27FC236}">
-                <a16:creationId xmlns:a16="http://schemas.microsoft.com/office/drawing/2014/main" id="{6D1404CB-EFA6-7EF7-66C7-8DF2F1AB786C}"/>
-              </a:ext>
-            </a:extLst>
-          </p:cNvPr>
-          <p:cNvPicPr>
-            <a:picLocks noChangeAspect="1" noChangeArrowheads="1"/>
-          </p:cNvPicPr>
-          <p:nvPr/>
-        </p:nvPicPr>
-        <p:blipFill rotWithShape="1">
-          <a:blip r:embed="rId4" cstate="email">
-            <a:extLst>
-              <a:ext uri="{28A0092B-C50C-407E-A947-70E740481C1C}">
-                <a14:useLocalDpi xmlns:a14="http://schemas.microsoft.com/office/drawing/2010/main"/>
-              </a:ext>
-            </a:extLst>
-          </a:blip>
-          <a:srcRect/>
-          <a:stretch/>
-        </p:blipFill>
-        <p:spPr bwMode="auto">
-          <a:xfrm>
-            <a:off x="10264756" y="3600147"/>
-            <a:ext cx="1739402" cy="1385047"/>
-          </a:xfrm>
-          <a:prstGeom prst="rect">
-            <a:avLst/>
-          </a:prstGeom>
-          <a:noFill/>
-          <a:extLst>
-            <a:ext uri="{909E8E84-426E-40DD-AFC4-6F175D3DCCD1}">
-              <a14:hiddenFill xmlns:a14="http://schemas.microsoft.com/office/drawing/2010/main">
-                <a:solidFill>
-                  <a:srgbClr val="FFFFFF"/>
-                </a:solidFill>
-              </a14:hiddenFill>
-            </a:ext>
-          </a:extLst>
-        </p:spPr>
-      </p:pic>
-      <p:pic>
-        <p:nvPicPr>
-          <p:cNvPr id="1030" name="Picture 6" descr="X590 Multi-Terrain Tractor, 54-inch deck">
-            <a:extLst>
-              <a:ext uri="{FF2B5EF4-FFF2-40B4-BE49-F238E27FC236}">
-                <a16:creationId xmlns:a16="http://schemas.microsoft.com/office/drawing/2014/main" id="{BAEA44D2-FDA6-2AB1-4EE0-5AE054D153ED}"/>
-              </a:ext>
-            </a:extLst>
-          </p:cNvPr>
-          <p:cNvPicPr>
-            <a:picLocks noChangeAspect="1" noChangeArrowheads="1"/>
-          </p:cNvPicPr>
-          <p:nvPr/>
-        </p:nvPicPr>
-        <p:blipFill>
-          <a:blip r:embed="rId5" cstate="email">
-            <a:extLst>
-              <a:ext uri="{28A0092B-C50C-407E-A947-70E740481C1C}">
-                <a14:useLocalDpi xmlns:a14="http://schemas.microsoft.com/office/drawing/2010/main"/>
-              </a:ext>
-            </a:extLst>
-          </a:blip>
-          <a:srcRect/>
-          <a:stretch>
-            <a:fillRect/>
-          </a:stretch>
-        </p:blipFill>
-        <p:spPr bwMode="auto">
-          <a:xfrm>
-            <a:off x="10469678" y="1444030"/>
-            <a:ext cx="1329558" cy="1107965"/>
-          </a:xfrm>
-          <a:prstGeom prst="rect">
-            <a:avLst/>
-          </a:prstGeom>
-          <a:noFill/>
-          <a:extLst>
-            <a:ext uri="{909E8E84-426E-40DD-AFC4-6F175D3DCCD1}">
-              <a14:hiddenFill xmlns:a14="http://schemas.microsoft.com/office/drawing/2010/main">
-                <a:solidFill>
-                  <a:srgbClr val="FFFFFF"/>
-                </a:solidFill>
-              </a14:hiddenFill>
-            </a:ext>
-          </a:extLst>
-        </p:spPr>
-      </p:pic>
-      <p:pic>
-        <p:nvPicPr>
-          <p:cNvPr id="1032" name="Picture 8" descr="X394 Tractor, 48-inch deck">
-            <a:extLst>
-              <a:ext uri="{FF2B5EF4-FFF2-40B4-BE49-F238E27FC236}">
-                <a16:creationId xmlns:a16="http://schemas.microsoft.com/office/drawing/2014/main" id="{FAF03351-F41D-4B23-AF1B-814459C202A0}"/>
-              </a:ext>
-            </a:extLst>
-          </p:cNvPr>
-          <p:cNvPicPr>
-            <a:picLocks noChangeAspect="1" noChangeArrowheads="1"/>
-          </p:cNvPicPr>
-          <p:nvPr/>
-        </p:nvPicPr>
-        <p:blipFill>
-          <a:blip r:embed="rId6" cstate="email">
-            <a:extLst>
-              <a:ext uri="{28A0092B-C50C-407E-A947-70E740481C1C}">
-                <a14:useLocalDpi xmlns:a14="http://schemas.microsoft.com/office/drawing/2010/main"/>
-              </a:ext>
-            </a:extLst>
-          </a:blip>
-          <a:srcRect/>
-          <a:stretch>
-            <a:fillRect/>
-          </a:stretch>
-        </p:blipFill>
-        <p:spPr bwMode="auto">
-          <a:xfrm>
-            <a:off x="1989370" y="4815146"/>
-            <a:ext cx="1503939" cy="1217474"/>
-          </a:xfrm>
-          <a:prstGeom prst="rect">
-            <a:avLst/>
-          </a:prstGeom>
-          <a:noFill/>
-          <a:extLst>
-            <a:ext uri="{909E8E84-426E-40DD-AFC4-6F175D3DCCD1}">
-              <a14:hiddenFill xmlns:a14="http://schemas.microsoft.com/office/drawing/2010/main">
-                <a:solidFill>
-                  <a:srgbClr val="FFFFFF"/>
-                </a:solidFill>
-              </a14:hiddenFill>
-            </a:ext>
-          </a:extLst>
-        </p:spPr>
-      </p:pic>
-      <p:pic>
-        <p:nvPicPr>
-          <p:cNvPr id="1034" name="Picture 10" descr="Studio image of a S240 with 48-in. Deck">
-            <a:extLst>
-              <a:ext uri="{FF2B5EF4-FFF2-40B4-BE49-F238E27FC236}">
-                <a16:creationId xmlns:a16="http://schemas.microsoft.com/office/drawing/2014/main" id="{E0531D71-6031-F709-1C0E-C99B6B672577}"/>
-              </a:ext>
-            </a:extLst>
-          </p:cNvPr>
-          <p:cNvPicPr>
-            <a:picLocks noChangeAspect="1" noChangeArrowheads="1"/>
-          </p:cNvPicPr>
-          <p:nvPr/>
-        </p:nvPicPr>
-        <p:blipFill rotWithShape="1">
-          <a:blip r:embed="rId7" cstate="email">
-            <a:extLst>
-              <a:ext uri="{28A0092B-C50C-407E-A947-70E740481C1C}">
-                <a14:useLocalDpi xmlns:a14="http://schemas.microsoft.com/office/drawing/2010/main"/>
-              </a:ext>
-            </a:extLst>
-          </a:blip>
-          <a:srcRect/>
-          <a:stretch/>
-        </p:blipFill>
-        <p:spPr bwMode="auto">
-          <a:xfrm>
-            <a:off x="1927243" y="2999982"/>
-            <a:ext cx="1614429" cy="1200330"/>
-          </a:xfrm>
-          <a:prstGeom prst="rect">
-            <a:avLst/>
-          </a:prstGeom>
-          <a:noFill/>
-          <a:extLst>
-            <a:ext uri="{909E8E84-426E-40DD-AFC4-6F175D3DCCD1}">
-              <a14:hiddenFill xmlns:a14="http://schemas.microsoft.com/office/drawing/2010/main">
-                <a:solidFill>
-                  <a:srgbClr val="FFFFFF"/>
-                </a:solidFill>
-              </a14:hiddenFill>
-            </a:ext>
-          </a:extLst>
-        </p:spPr>
-      </p:pic>
-    </p:spTree>
-    <p:extLst>
-      <p:ext uri="{BB962C8B-B14F-4D97-AF65-F5344CB8AC3E}">
-        <p14:creationId xmlns:p14="http://schemas.microsoft.com/office/powerpoint/2010/main" val="3886189577"/>
       </p:ext>
     </p:extLst>
   </p:cSld>
@@ -8921,4 +12193,319 @@
     </a:ext>
   </a:extLst>
 </a:theme>
+</file>
+
+<file path=ppt/theme/theme2.xml><?xml version="1.0" encoding="utf-8"?>
+<a:theme xmlns:a="http://schemas.openxmlformats.org/drawingml/2006/main" name="Office Theme">
+  <a:themeElements>
+    <a:clrScheme name="Office">
+      <a:dk1>
+        <a:sysClr val="windowText" lastClr="000000"/>
+      </a:dk1>
+      <a:lt1>
+        <a:sysClr val="window" lastClr="FFFFFF"/>
+      </a:lt1>
+      <a:dk2>
+        <a:srgbClr val="0E2841"/>
+      </a:dk2>
+      <a:lt2>
+        <a:srgbClr val="E8E8E8"/>
+      </a:lt2>
+      <a:accent1>
+        <a:srgbClr val="156082"/>
+      </a:accent1>
+      <a:accent2>
+        <a:srgbClr val="E97132"/>
+      </a:accent2>
+      <a:accent3>
+        <a:srgbClr val="196B24"/>
+      </a:accent3>
+      <a:accent4>
+        <a:srgbClr val="0F9ED5"/>
+      </a:accent4>
+      <a:accent5>
+        <a:srgbClr val="A02B93"/>
+      </a:accent5>
+      <a:accent6>
+        <a:srgbClr val="4EA72E"/>
+      </a:accent6>
+      <a:hlink>
+        <a:srgbClr val="467886"/>
+      </a:hlink>
+      <a:folHlink>
+        <a:srgbClr val="96607D"/>
+      </a:folHlink>
+    </a:clrScheme>
+    <a:fontScheme name="Office">
+      <a:majorFont>
+        <a:latin typeface="Aptos Display" panose="02110004020202020204"/>
+        <a:ea typeface=""/>
+        <a:cs typeface=""/>
+        <a:font script="Jpan" typeface="游ゴシック Light"/>
+        <a:font script="Hang" typeface="맑은 고딕"/>
+        <a:font script="Hans" typeface="等线 Light"/>
+        <a:font script="Hant" typeface="新細明體"/>
+        <a:font script="Arab" typeface="Times New Roman"/>
+        <a:font script="Hebr" typeface="Times New Roman"/>
+        <a:font script="Thai" typeface="Angsana New"/>
+        <a:font script="Ethi" typeface="Nyala"/>
+        <a:font script="Beng" typeface="Vrinda"/>
+        <a:font script="Gujr" typeface="Shruti"/>
+        <a:font script="Khmr" typeface="MoolBoran"/>
+        <a:font script="Knda" typeface="Tunga"/>
+        <a:font script="Guru" typeface="Raavi"/>
+        <a:font script="Cans" typeface="Euphemia"/>
+        <a:font script="Cher" typeface="Plantagenet Cherokee"/>
+        <a:font script="Yiii" typeface="Microsoft Yi Baiti"/>
+        <a:font script="Tibt" typeface="Microsoft Himalaya"/>
+        <a:font script="Thaa" typeface="MV Boli"/>
+        <a:font script="Deva" typeface="Mangal"/>
+        <a:font script="Telu" typeface="Gautami"/>
+        <a:font script="Taml" typeface="Latha"/>
+        <a:font script="Syrc" typeface="Estrangelo Edessa"/>
+        <a:font script="Orya" typeface="Kalinga"/>
+        <a:font script="Mlym" typeface="Kartika"/>
+        <a:font script="Laoo" typeface="DokChampa"/>
+        <a:font script="Sinh" typeface="Iskoola Pota"/>
+        <a:font script="Mong" typeface="Mongolian Baiti"/>
+        <a:font script="Viet" typeface="Times New Roman"/>
+        <a:font script="Uigh" typeface="Microsoft Uighur"/>
+        <a:font script="Geor" typeface="Sylfaen"/>
+        <a:font script="Armn" typeface="Arial"/>
+        <a:font script="Bugi" typeface="Leelawadee UI"/>
+        <a:font script="Bopo" typeface="Microsoft JhengHei"/>
+        <a:font script="Java" typeface="Javanese Text"/>
+        <a:font script="Lisu" typeface="Segoe UI"/>
+        <a:font script="Mymr" typeface="Myanmar Text"/>
+        <a:font script="Nkoo" typeface="Ebrima"/>
+        <a:font script="Olck" typeface="Nirmala UI"/>
+        <a:font script="Osma" typeface="Ebrima"/>
+        <a:font script="Phag" typeface="Phagspa"/>
+        <a:font script="Syrn" typeface="Estrangelo Edessa"/>
+        <a:font script="Syrj" typeface="Estrangelo Edessa"/>
+        <a:font script="Syre" typeface="Estrangelo Edessa"/>
+        <a:font script="Sora" typeface="Nirmala UI"/>
+        <a:font script="Tale" typeface="Microsoft Tai Le"/>
+        <a:font script="Talu" typeface="Microsoft New Tai Lue"/>
+        <a:font script="Tfng" typeface="Ebrima"/>
+      </a:majorFont>
+      <a:minorFont>
+        <a:latin typeface="Aptos" panose="02110004020202020204"/>
+        <a:ea typeface=""/>
+        <a:cs typeface=""/>
+        <a:font script="Jpan" typeface="游ゴシック"/>
+        <a:font script="Hang" typeface="맑은 고딕"/>
+        <a:font script="Hans" typeface="等线"/>
+        <a:font script="Hant" typeface="新細明體"/>
+        <a:font script="Arab" typeface="Arial"/>
+        <a:font script="Hebr" typeface="Arial"/>
+        <a:font script="Thai" typeface="Cordia New"/>
+        <a:font script="Ethi" typeface="Nyala"/>
+        <a:font script="Beng" typeface="Vrinda"/>
+        <a:font script="Gujr" typeface="Shruti"/>
+        <a:font script="Khmr" typeface="DaunPenh"/>
+        <a:font script="Knda" typeface="Tunga"/>
+        <a:font script="Guru" typeface="Raavi"/>
+        <a:font script="Cans" typeface="Euphemia"/>
+        <a:font script="Cher" typeface="Plantagenet Cherokee"/>
+        <a:font script="Yiii" typeface="Microsoft Yi Baiti"/>
+        <a:font script="Tibt" typeface="Microsoft Himalaya"/>
+        <a:font script="Thaa" typeface="MV Boli"/>
+        <a:font script="Deva" typeface="Mangal"/>
+        <a:font script="Telu" typeface="Gautami"/>
+        <a:font script="Taml" typeface="Latha"/>
+        <a:font script="Syrc" typeface="Estrangelo Edessa"/>
+        <a:font script="Orya" typeface="Kalinga"/>
+        <a:font script="Mlym" typeface="Kartika"/>
+        <a:font script="Laoo" typeface="DokChampa"/>
+        <a:font script="Sinh" typeface="Iskoola Pota"/>
+        <a:font script="Mong" typeface="Mongolian Baiti"/>
+        <a:font script="Viet" typeface="Arial"/>
+        <a:font script="Uigh" typeface="Microsoft Uighur"/>
+        <a:font script="Geor" typeface="Sylfaen"/>
+        <a:font script="Armn" typeface="Arial"/>
+        <a:font script="Bugi" typeface="Leelawadee UI"/>
+        <a:font script="Bopo" typeface="Microsoft JhengHei"/>
+        <a:font script="Java" typeface="Javanese Text"/>
+        <a:font script="Lisu" typeface="Segoe UI"/>
+        <a:font script="Mymr" typeface="Myanmar Text"/>
+        <a:font script="Nkoo" typeface="Ebrima"/>
+        <a:font script="Olck" typeface="Nirmala UI"/>
+        <a:font script="Osma" typeface="Ebrima"/>
+        <a:font script="Phag" typeface="Phagspa"/>
+        <a:font script="Syrn" typeface="Estrangelo Edessa"/>
+        <a:font script="Syrj" typeface="Estrangelo Edessa"/>
+        <a:font script="Syre" typeface="Estrangelo Edessa"/>
+        <a:font script="Sora" typeface="Nirmala UI"/>
+        <a:font script="Tale" typeface="Microsoft Tai Le"/>
+        <a:font script="Talu" typeface="Microsoft New Tai Lue"/>
+        <a:font script="Tfng" typeface="Ebrima"/>
+      </a:minorFont>
+    </a:fontScheme>
+    <a:fmtScheme name="Office">
+      <a:fillStyleLst>
+        <a:solidFill>
+          <a:schemeClr val="phClr"/>
+        </a:solidFill>
+        <a:gradFill rotWithShape="1">
+          <a:gsLst>
+            <a:gs pos="0">
+              <a:schemeClr val="phClr">
+                <a:lumMod val="110000"/>
+                <a:satMod val="105000"/>
+                <a:tint val="67000"/>
+              </a:schemeClr>
+            </a:gs>
+            <a:gs pos="50000">
+              <a:schemeClr val="phClr">
+                <a:lumMod val="105000"/>
+                <a:satMod val="103000"/>
+                <a:tint val="73000"/>
+              </a:schemeClr>
+            </a:gs>
+            <a:gs pos="100000">
+              <a:schemeClr val="phClr">
+                <a:lumMod val="105000"/>
+                <a:satMod val="109000"/>
+                <a:tint val="81000"/>
+              </a:schemeClr>
+            </a:gs>
+          </a:gsLst>
+          <a:lin ang="5400000" scaled="0"/>
+        </a:gradFill>
+        <a:gradFill rotWithShape="1">
+          <a:gsLst>
+            <a:gs pos="0">
+              <a:schemeClr val="phClr">
+                <a:satMod val="103000"/>
+                <a:lumMod val="102000"/>
+                <a:tint val="94000"/>
+              </a:schemeClr>
+            </a:gs>
+            <a:gs pos="50000">
+              <a:schemeClr val="phClr">
+                <a:satMod val="110000"/>
+                <a:lumMod val="100000"/>
+                <a:shade val="100000"/>
+              </a:schemeClr>
+            </a:gs>
+            <a:gs pos="100000">
+              <a:schemeClr val="phClr">
+                <a:lumMod val="99000"/>
+                <a:satMod val="120000"/>
+                <a:shade val="78000"/>
+              </a:schemeClr>
+            </a:gs>
+          </a:gsLst>
+          <a:lin ang="5400000" scaled="0"/>
+        </a:gradFill>
+      </a:fillStyleLst>
+      <a:lnStyleLst>
+        <a:ln w="12700" cap="flat" cmpd="sng" algn="ctr">
+          <a:solidFill>
+            <a:schemeClr val="phClr"/>
+          </a:solidFill>
+          <a:prstDash val="solid"/>
+          <a:miter lim="800000"/>
+        </a:ln>
+        <a:ln w="19050" cap="flat" cmpd="sng" algn="ctr">
+          <a:solidFill>
+            <a:schemeClr val="phClr"/>
+          </a:solidFill>
+          <a:prstDash val="solid"/>
+          <a:miter lim="800000"/>
+        </a:ln>
+        <a:ln w="25400" cap="flat" cmpd="sng" algn="ctr">
+          <a:solidFill>
+            <a:schemeClr val="phClr"/>
+          </a:solidFill>
+          <a:prstDash val="solid"/>
+          <a:miter lim="800000"/>
+        </a:ln>
+      </a:lnStyleLst>
+      <a:effectStyleLst>
+        <a:effectStyle>
+          <a:effectLst/>
+        </a:effectStyle>
+        <a:effectStyle>
+          <a:effectLst/>
+        </a:effectStyle>
+        <a:effectStyle>
+          <a:effectLst>
+            <a:outerShdw blurRad="57150" dist="19050" dir="5400000" algn="ctr" rotWithShape="0">
+              <a:srgbClr val="000000">
+                <a:alpha val="63000"/>
+              </a:srgbClr>
+            </a:outerShdw>
+          </a:effectLst>
+        </a:effectStyle>
+      </a:effectStyleLst>
+      <a:bgFillStyleLst>
+        <a:solidFill>
+          <a:schemeClr val="phClr"/>
+        </a:solidFill>
+        <a:solidFill>
+          <a:schemeClr val="phClr">
+            <a:tint val="95000"/>
+            <a:satMod val="170000"/>
+          </a:schemeClr>
+        </a:solidFill>
+        <a:gradFill rotWithShape="1">
+          <a:gsLst>
+            <a:gs pos="0">
+              <a:schemeClr val="phClr">
+                <a:tint val="93000"/>
+                <a:satMod val="150000"/>
+                <a:shade val="98000"/>
+                <a:lumMod val="102000"/>
+              </a:schemeClr>
+            </a:gs>
+            <a:gs pos="50000">
+              <a:schemeClr val="phClr">
+                <a:tint val="98000"/>
+                <a:satMod val="130000"/>
+                <a:shade val="90000"/>
+                <a:lumMod val="103000"/>
+              </a:schemeClr>
+            </a:gs>
+            <a:gs pos="100000">
+              <a:schemeClr val="phClr">
+                <a:shade val="63000"/>
+                <a:satMod val="120000"/>
+              </a:schemeClr>
+            </a:gs>
+          </a:gsLst>
+          <a:lin ang="5400000" scaled="0"/>
+        </a:gradFill>
+      </a:bgFillStyleLst>
+    </a:fmtScheme>
+  </a:themeElements>
+  <a:objectDefaults>
+    <a:lnDef>
+      <a:spPr/>
+      <a:bodyPr/>
+      <a:lstStyle/>
+      <a:style>
+        <a:lnRef idx="2">
+          <a:schemeClr val="accent1"/>
+        </a:lnRef>
+        <a:fillRef idx="0">
+          <a:schemeClr val="accent1"/>
+        </a:fillRef>
+        <a:effectRef idx="1">
+          <a:schemeClr val="accent1"/>
+        </a:effectRef>
+        <a:fontRef idx="minor">
+          <a:schemeClr val="tx1"/>
+        </a:fontRef>
+      </a:style>
+    </a:lnDef>
+  </a:objectDefaults>
+  <a:extraClrSchemeLst/>
+  <a:extLst>
+    <a:ext uri="{05A4C25C-085E-4340-85A3-A5531E510DB2}">
+      <thm15:themeFamily xmlns:thm15="http://schemas.microsoft.com/office/thememl/2012/main" name="Office Theme" id="{2E142A2C-CD16-42D6-873A-C26D2A0506FA}" vid="{1BDDFF52-6CD6-40A5-AB3C-68EB2F1E4D0A}"/>
+    </a:ext>
+  </a:extLst>
+</a:theme>
 </file>